--- a/CivicClean_Municipal_Waste_Fleet_Tracking_Presentation.pptx
+++ b/CivicClean_Municipal_Waste_Fleet_Tracking_Presentation.pptx
@@ -3205,8 +3205,8 @@
         </p:blipFill>
         <p:spPr>
           <a:xfrm>
-            <a:off x="822960" y="502920"/>
-            <a:ext cx="1097280" cy="1124598"/>
+            <a:off x="822960" y="475488"/>
+            <a:ext cx="1143000" cy="1171456"/>
           </a:xfrm>
           <a:prstGeom prst="rect">
             <a:avLst/>
@@ -3221,7 +3221,7 @@
         </p:nvSpPr>
         <p:spPr>
           <a:xfrm>
-            <a:off x="2103120" y="502920"/>
+            <a:off x="2148840" y="457200"/>
             <a:ext cx="9235440" cy="1005840"/>
           </a:xfrm>
           <a:prstGeom prst="rect">
@@ -3236,7 +3236,7 @@
           <a:lstStyle/>
           <a:p>
             <a:pPr>
-              <a:defRPr sz="1300" b="1">
+              <a:defRPr sz="1350" b="1">
                 <a:solidFill>
                   <a:srgbClr val="E2E8F0"/>
                 </a:solidFill>
@@ -3249,7 +3249,7 @@
           </a:p>
           <a:p>
             <a:pPr>
-              <a:defRPr sz="950" b="1">
+              <a:defRPr sz="1000" b="1">
                 <a:solidFill>
                   <a:srgbClr val="93C5FD"/>
                 </a:solidFill>
@@ -3257,7 +3257,7 @@
               </a:defRPr>
             </a:pPr>
             <a:r>
-              <a:t>DEPARTMENT OF COMPUTER SCIENCE AND ENGINEERING | 23CS4219 - SOFTWARE ENGINEERING LABORATORY</a:t>
+              <a:t>DEPARTMENT OF COMPUTER SCIENCE AND ENGINEERING | 23CS4219 - SOFTWARE ENGINEERING LAB</a:t>
             </a:r>
           </a:p>
         </p:txBody>
@@ -3270,8 +3270,8 @@
         </p:nvSpPr>
         <p:spPr>
           <a:xfrm>
-            <a:off x="822960" y="1691640"/>
-            <a:ext cx="4389120" cy="320040"/>
+            <a:off x="822960" y="1664208"/>
+            <a:ext cx="4754880" cy="320040"/>
           </a:xfrm>
           <a:prstGeom prst="roundRect">
             <a:avLst/>
@@ -3304,7 +3304,7 @@
           <a:lstStyle/>
           <a:p>
             <a:pPr algn="ctr">
-              <a:defRPr sz="900" b="1">
+              <a:defRPr sz="950" b="1">
                 <a:solidFill>
                   <a:srgbClr val="BFDBFE"/>
                 </a:solidFill>
@@ -3325,8 +3325,8 @@
         </p:nvSpPr>
         <p:spPr>
           <a:xfrm>
-            <a:off x="822960" y="2103120"/>
-            <a:ext cx="10515600" cy="1645920"/>
+            <a:off x="822960" y="2066543"/>
+            <a:ext cx="10515600" cy="1691640"/>
           </a:xfrm>
           <a:prstGeom prst="rect">
             <a:avLst/>
@@ -3343,7 +3343,7 @@
               <a:spcAft>
                 <a:spcPts val="800"/>
               </a:spcAft>
-              <a:defRPr sz="2600" b="1">
+              <a:defRPr sz="2500" b="1">
                 <a:solidFill>
                   <a:srgbClr val="FFFFFF"/>
                 </a:solidFill>
@@ -3360,7 +3360,7 @@
           </a:p>
           <a:p>
             <a:pPr>
-              <a:defRPr sz="1200">
+              <a:defRPr sz="1300">
                 <a:solidFill>
                   <a:srgbClr val="94A3B8"/>
                 </a:solidFill>
@@ -3368,7 +3368,7 @@
               </a:defRPr>
             </a:pPr>
             <a:r>
-              <a:t>A Pure Software-Only (Zero Hardware) Smart Waste Logistics &amp; Proof-of-Service Verification Platform</a:t>
+              <a:t>A Hardware-Free, Software-Only Smart Waste Logistics &amp; Proof-of-Service Verification Platform</a:t>
             </a:r>
           </a:p>
         </p:txBody>
@@ -3382,7 +3382,7 @@
         <p:spPr>
           <a:xfrm>
             <a:off x="822960" y="3977639"/>
-            <a:ext cx="5120640" cy="2377440"/>
+            <a:ext cx="5120640" cy="2423160"/>
           </a:xfrm>
           <a:prstGeom prst="roundRect">
             <a:avLst/>
@@ -3411,14 +3411,14 @@
           </a:fontRef>
         </p:style>
         <p:txBody>
-          <a:bodyPr rtlCol="0" anchor="ctr" wrap="square" lIns="274320" tIns="228600"/>
+          <a:bodyPr rtlCol="0" anchor="ctr" wrap="square" lIns="274320" tIns="182880"/>
           <a:lstStyle/>
           <a:p>
             <a:pPr algn="ctr">
               <a:spcAft>
                 <a:spcPts val="800"/>
               </a:spcAft>
-              <a:defRPr sz="1000" b="1">
+              <a:defRPr sz="1100" b="1">
                 <a:solidFill>
                   <a:srgbClr val="38BDF8"/>
                 </a:solidFill>
@@ -3432,9 +3432,9 @@
           <a:p>
             <a:pPr>
               <a:spcAft>
-                <a:spcPts val="200"/>
-              </a:spcAft>
-              <a:defRPr sz="1050">
+                <a:spcPts val="300"/>
+              </a:spcAft>
+              <a:defRPr sz="1200">
                 <a:solidFill>
                   <a:srgbClr val="F1F5F9"/>
                 </a:solidFill>
@@ -3442,15 +3442,15 @@
               </a:defRPr>
             </a:pPr>
             <a:r>
-              <a:t>Name:  SAIKIRAN BORA</a:t>
-            </a:r>
-          </a:p>
-          <a:p>
-            <a:pPr>
-              <a:spcAft>
-                <a:spcPts val="200"/>
-              </a:spcAft>
-              <a:defRPr sz="1050">
+              <a:t>Candidate Name:  SAIKIRAN BORA</a:t>
+            </a:r>
+          </a:p>
+          <a:p>
+            <a:pPr>
+              <a:spcAft>
+                <a:spcPts val="300"/>
+              </a:spcAft>
+              <a:defRPr sz="1200">
                 <a:solidFill>
                   <a:srgbClr val="F1F5F9"/>
                 </a:solidFill>
@@ -3464,9 +3464,9 @@
           <a:p>
             <a:pPr>
               <a:spcAft>
-                <a:spcPts val="200"/>
-              </a:spcAft>
-              <a:defRPr sz="1050">
+                <a:spcPts val="300"/>
+              </a:spcAft>
+              <a:defRPr sz="1200">
                 <a:solidFill>
                   <a:srgbClr val="F1F5F9"/>
                 </a:solidFill>
@@ -3480,9 +3480,9 @@
           <a:p>
             <a:pPr>
               <a:spcAft>
-                <a:spcPts val="200"/>
-              </a:spcAft>
-              <a:defRPr sz="1050">
+                <a:spcPts val="300"/>
+              </a:spcAft>
+              <a:defRPr sz="1200">
                 <a:solidFill>
                   <a:srgbClr val="F1F5F9"/>
                 </a:solidFill>
@@ -3496,9 +3496,9 @@
           <a:p>
             <a:pPr>
               <a:spcAft>
-                <a:spcPts val="200"/>
-              </a:spcAft>
-              <a:defRPr sz="1050">
+                <a:spcPts val="300"/>
+              </a:spcAft>
+              <a:defRPr sz="1200">
                 <a:solidFill>
                   <a:srgbClr val="F1F5F9"/>
                 </a:solidFill>
@@ -3506,7 +3506,7 @@
               </a:defRPr>
             </a:pPr>
             <a:r>
-              <a:t>Institution:  ANITS (Anil Neerukonda Institute of Tech &amp; Sci)</a:t>
+              <a:t>Institution:  ANITS (Anil Neerukonda Inst of Tech &amp; Sci)</a:t>
             </a:r>
           </a:p>
         </p:txBody>
@@ -3520,7 +3520,7 @@
         <p:spPr>
           <a:xfrm>
             <a:off x="6217920" y="3977639"/>
-            <a:ext cx="5120640" cy="2377440"/>
+            <a:ext cx="5120640" cy="2423160"/>
           </a:xfrm>
           <a:prstGeom prst="roundRect">
             <a:avLst/>
@@ -3549,14 +3549,14 @@
           </a:fontRef>
         </p:style>
         <p:txBody>
-          <a:bodyPr rtlCol="0" anchor="ctr" wrap="square" lIns="274320" tIns="228600"/>
+          <a:bodyPr rtlCol="0" anchor="ctr" wrap="square" lIns="274320" tIns="182880"/>
           <a:lstStyle/>
           <a:p>
             <a:pPr algn="ctr">
               <a:spcAft>
                 <a:spcPts val="800"/>
               </a:spcAft>
-              <a:defRPr sz="1000" b="1">
+              <a:defRPr sz="1100" b="1">
                 <a:solidFill>
                   <a:srgbClr val="34D399"/>
                 </a:solidFill>
@@ -3570,9 +3570,9 @@
           <a:p>
             <a:pPr>
               <a:spcAft>
-                <a:spcPts val="200"/>
-              </a:spcAft>
-              <a:defRPr sz="1050">
+                <a:spcPts val="300"/>
+              </a:spcAft>
+              <a:defRPr sz="1200">
                 <a:solidFill>
                   <a:srgbClr val="F1F5F9"/>
                 </a:solidFill>
@@ -3586,9 +3586,9 @@
           <a:p>
             <a:pPr>
               <a:spcAft>
-                <a:spcPts val="200"/>
-              </a:spcAft>
-              <a:defRPr sz="1050">
+                <a:spcPts val="300"/>
+              </a:spcAft>
+              <a:defRPr sz="1200">
                 <a:solidFill>
                   <a:srgbClr val="F1F5F9"/>
                 </a:solidFill>
@@ -3602,9 +3602,9 @@
           <a:p>
             <a:pPr>
               <a:spcAft>
-                <a:spcPts val="200"/>
-              </a:spcAft>
-              <a:defRPr sz="1050">
+                <a:spcPts val="300"/>
+              </a:spcAft>
+              <a:defRPr sz="1200">
                 <a:solidFill>
                   <a:srgbClr val="F1F5F9"/>
                 </a:solidFill>
@@ -3618,9 +3618,9 @@
           <a:p>
             <a:pPr>
               <a:spcAft>
-                <a:spcPts val="200"/>
-              </a:spcAft>
-              <a:defRPr sz="1050">
+                <a:spcPts val="300"/>
+              </a:spcAft>
+              <a:defRPr sz="1200">
                 <a:solidFill>
                   <a:srgbClr val="F1F5F9"/>
                 </a:solidFill>
@@ -3634,9 +3634,9 @@
           <a:p>
             <a:pPr>
               <a:spcAft>
-                <a:spcPts val="200"/>
-              </a:spcAft>
-              <a:defRPr sz="1050">
+                <a:spcPts val="300"/>
+              </a:spcAft>
+              <a:defRPr sz="1200">
                 <a:solidFill>
                   <a:srgbClr val="F1F5F9"/>
                 </a:solidFill>
@@ -3644,7 +3644,7 @@
               </a:defRPr>
             </a:pPr>
             <a:r>
-              <a:t>Academic Year:  2026 • 2027</a:t>
+              <a:t>Academic Year:  2026 - 2027</a:t>
             </a:r>
           </a:p>
         </p:txBody>
@@ -3718,8 +3718,8 @@
         </p:nvSpPr>
         <p:spPr>
           <a:xfrm>
-            <a:off x="731520" y="365760"/>
-            <a:ext cx="4114800" cy="292608"/>
+            <a:off x="731520" y="347472"/>
+            <a:ext cx="4389120" cy="310896"/>
           </a:xfrm>
           <a:prstGeom prst="roundRect">
             <a:avLst/>
@@ -3752,7 +3752,7 @@
           <a:lstStyle/>
           <a:p>
             <a:pPr algn="ctr">
-              <a:defRPr sz="850" b="1">
+              <a:defRPr sz="950" b="1">
                 <a:solidFill>
                   <a:srgbClr val="2563EB"/>
                 </a:solidFill>
@@ -3774,7 +3774,7 @@
         <p:spPr>
           <a:xfrm>
             <a:off x="731520" y="658368"/>
-            <a:ext cx="10698480" cy="594360"/>
+            <a:ext cx="10698480" cy="621792"/>
           </a:xfrm>
           <a:prstGeom prst="rect">
             <a:avLst/>
@@ -3788,7 +3788,7 @@
           <a:lstStyle/>
           <a:p>
             <a:pPr>
-              <a:defRPr sz="2100" b="1">
+              <a:defRPr sz="2200" b="1">
                 <a:solidFill>
                   <a:srgbClr val="0F172A"/>
                 </a:solidFill>
@@ -3809,7 +3809,7 @@
         </p:nvSpPr>
         <p:spPr>
           <a:xfrm>
-            <a:off x="731520" y="1298448"/>
+            <a:off x="731520" y="1316736"/>
             <a:ext cx="10728655" cy="18288"/>
           </a:xfrm>
           <a:prstGeom prst="rect">
@@ -3867,7 +3867,7 @@
           <a:lstStyle/>
           <a:p>
             <a:pPr>
-              <a:defRPr sz="800">
+              <a:defRPr sz="900">
                 <a:solidFill>
                   <a:srgbClr val="64748B"/>
                 </a:solidFill>
@@ -3913,7 +3913,7 @@
         <p:spPr>
           <a:xfrm>
             <a:off x="6766560" y="1508760"/>
-            <a:ext cx="4693615" cy="4526280"/>
+            <a:ext cx="4693615" cy="4572000"/>
           </a:xfrm>
           <a:prstGeom prst="roundRect">
             <a:avLst/>
@@ -3947,9 +3947,9 @@
           <a:p>
             <a:pPr algn="ctr">
               <a:spcAft>
-                <a:spcPts val="400"/>
-              </a:spcAft>
-              <a:defRPr sz="1200" b="1">
+                <a:spcPts val="600"/>
+              </a:spcAft>
+              <a:defRPr sz="1300" b="1">
                 <a:solidFill>
                   <a:srgbClr val="1E3A8A"/>
                 </a:solidFill>
@@ -3963,9 +3963,9 @@
           <a:p>
             <a:pPr>
               <a:spcAft>
-                <a:spcPts val="400"/>
-              </a:spcAft>
-              <a:defRPr sz="950">
+                <a:spcPts val="800"/>
+              </a:spcAft>
+              <a:defRPr sz="1200">
                 <a:solidFill>
                   <a:srgbClr val="475569"/>
                 </a:solidFill>
@@ -3973,15 +3973,15 @@
               </a:defRPr>
             </a:pPr>
             <a:r>
-              <a:t>• Hotspot Reporting Form: Residents report overflowing public bins, missed scheduled pickups, or illegal roadside waste dumps directly from their phone browser.</a:t>
-            </a:r>
-          </a:p>
-          <a:p>
-            <a:pPr>
-              <a:spcAft>
-                <a:spcPts val="400"/>
-              </a:spcAft>
-              <a:defRPr sz="950">
+              <a:t>â¢ One-Tap GPS Pin Drop: Residents mark overflowing public bins or illegal garbage heaps using their phone's exact GPS coordinates.</a:t>
+            </a:r>
+          </a:p>
+          <a:p>
+            <a:pPr>
+              <a:spcAft>
+                <a:spcPts val="800"/>
+              </a:spcAft>
+              <a:defRPr sz="1200">
                 <a:solidFill>
                   <a:srgbClr val="475569"/>
                 </a:solidFill>
@@ -3989,15 +3989,15 @@
               </a:defRPr>
             </a:pPr>
             <a:r>
-              <a:t>• One-Click GPS Pin Placement: Allows citizens to capture their phone's exact geolocation with a single tap, pinning the complaint on the municipal map.</a:t>
-            </a:r>
-          </a:p>
-          <a:p>
-            <a:pPr>
-              <a:spcAft>
-                <a:spcPts val="400"/>
-              </a:spcAft>
-              <a:defRPr sz="950">
+              <a:t>â¢ Photo Evidence Upload: Allows citizens to attach photos of uncollected waste for supervisory verification and dispatch triage.</a:t>
+            </a:r>
+          </a:p>
+          <a:p>
+            <a:pPr>
+              <a:spcAft>
+                <a:spcPts val="800"/>
+              </a:spcAft>
+              <a:defRPr sz="1200">
                 <a:solidFill>
                   <a:srgbClr val="475569"/>
                 </a:solidFill>
@@ -4005,15 +4005,15 @@
               </a:defRPr>
             </a:pPr>
             <a:r>
-              <a:t>• Photo Evidence Upload: Attaches photographic proof of garbage accumulation for supervisory triage and dispatch prioritization.</a:t>
-            </a:r>
-          </a:p>
-          <a:p>
-            <a:pPr>
-              <a:spcAft>
-                <a:spcPts val="400"/>
-              </a:spcAft>
-              <a:defRPr sz="950">
+              <a:t>â¢ Live 3-Stage Ticket Tracker: Unique complaint ID (e.g. #CMP-2026-104) shows real-time progress: Submitted -&gt; Truck Dispatched -&gt; Clearance Verified.</a:t>
+            </a:r>
+          </a:p>
+          <a:p>
+            <a:pPr>
+              <a:spcAft>
+                <a:spcPts val="800"/>
+              </a:spcAft>
+              <a:defRPr sz="1200">
                 <a:solidFill>
                   <a:srgbClr val="475569"/>
                 </a:solidFill>
@@ -4021,23 +4021,7 @@
               </a:defRPr>
             </a:pPr>
             <a:r>
-              <a:t>• Live Grievance Tracking Timeline: Unique tracking ticket ID (e.g. #CMP-2026-104) displays a 3-stage progress timeline: Submitted -&gt; Truck Dispatched -&gt; Clearance Verified.</a:t>
-            </a:r>
-          </a:p>
-          <a:p>
-            <a:pPr>
-              <a:spcAft>
-                <a:spcPts val="400"/>
-              </a:spcAft>
-              <a:defRPr sz="950">
-                <a:solidFill>
-                  <a:srgbClr val="475569"/>
-                </a:solidFill>
-                <a:latin typeface="Segoe UI"/>
-              </a:defRPr>
-            </a:pPr>
-            <a:r>
-              <a:t>• Ward Collection Timings Roster: Public schedule displaying daily pickup time slots and assigned vehicles across municipal wards.</a:t>
+              <a:t>â¢ Public Collection Roster: Displays daily pickup schedules and assigned compactor trucks across wards to prevent premature bin dumping.</a:t>
             </a:r>
           </a:p>
         </p:txBody>
@@ -4111,8 +4095,8 @@
         </p:nvSpPr>
         <p:spPr>
           <a:xfrm>
-            <a:off x="731520" y="365760"/>
-            <a:ext cx="4114800" cy="292608"/>
+            <a:off x="731520" y="347472"/>
+            <a:ext cx="4389120" cy="310896"/>
           </a:xfrm>
           <a:prstGeom prst="roundRect">
             <a:avLst/>
@@ -4145,7 +4129,7 @@
           <a:lstStyle/>
           <a:p>
             <a:pPr algn="ctr">
-              <a:defRPr sz="850" b="1">
+              <a:defRPr sz="950" b="1">
                 <a:solidFill>
                   <a:srgbClr val="2563EB"/>
                 </a:solidFill>
@@ -4167,7 +4151,7 @@
         <p:spPr>
           <a:xfrm>
             <a:off x="731520" y="658368"/>
-            <a:ext cx="10698480" cy="594360"/>
+            <a:ext cx="10698480" cy="621792"/>
           </a:xfrm>
           <a:prstGeom prst="rect">
             <a:avLst/>
@@ -4181,7 +4165,7 @@
           <a:lstStyle/>
           <a:p>
             <a:pPr>
-              <a:defRPr sz="2100" b="1">
+              <a:defRPr sz="2200" b="1">
                 <a:solidFill>
                   <a:srgbClr val="0F172A"/>
                 </a:solidFill>
@@ -4202,7 +4186,7 @@
         </p:nvSpPr>
         <p:spPr>
           <a:xfrm>
-            <a:off x="731520" y="1298448"/>
+            <a:off x="731520" y="1316736"/>
             <a:ext cx="10728655" cy="18288"/>
           </a:xfrm>
           <a:prstGeom prst="rect">
@@ -4260,7 +4244,7 @@
           <a:lstStyle/>
           <a:p>
             <a:pPr>
-              <a:defRPr sz="800">
+              <a:defRPr sz="900">
                 <a:solidFill>
                   <a:srgbClr val="64748B"/>
                 </a:solidFill>
@@ -4306,7 +4290,7 @@
         <p:spPr>
           <a:xfrm>
             <a:off x="6766560" y="1508760"/>
-            <a:ext cx="4693615" cy="4526280"/>
+            <a:ext cx="4693615" cy="4572000"/>
           </a:xfrm>
           <a:prstGeom prst="roundRect">
             <a:avLst/>
@@ -4340,9 +4324,9 @@
           <a:p>
             <a:pPr algn="ctr">
               <a:spcAft>
-                <a:spcPts val="400"/>
-              </a:spcAft>
-              <a:defRPr sz="1200" b="1">
+                <a:spcPts val="600"/>
+              </a:spcAft>
+              <a:defRPr sz="1300" b="1">
                 <a:solidFill>
                   <a:srgbClr val="1E3A8A"/>
                 </a:solidFill>
@@ -4356,9 +4340,9 @@
           <a:p>
             <a:pPr>
               <a:spcAft>
-                <a:spcPts val="400"/>
-              </a:spcAft>
-              <a:defRPr sz="900">
+                <a:spcPts val="600"/>
+              </a:spcAft>
+              <a:defRPr sz="1200">
                 <a:solidFill>
                   <a:srgbClr val="475569"/>
                 </a:solidFill>
@@ -4366,23 +4350,15 @@
               </a:defRPr>
             </a:pPr>
             <a:r>
-              <a:t>• Haversine Spherical Distance Validation: Calculates great-circle distance between truck GPS (lat1, lon1) and bin coordinates (lat2, lon2):</a:t>
-            </a:r>
-            <a:br/>
-            <a:r>
-              <a:t>  d = 2R • arcsin(•(sin•(••/2) + cos(•1)cos(•2)sin•(••/2)))</a:t>
-            </a:r>
-            <a:br/>
-            <a:r>
-              <a:t>If d &lt;= 15.0 meters, collection action is unlocked; otherwise blocked.</a:t>
-            </a:r>
-          </a:p>
-          <a:p>
-            <a:pPr>
-              <a:spcAft>
-                <a:spcPts val="400"/>
-              </a:spcAft>
-              <a:defRPr sz="900">
+              <a:t>â¢ Haversine Distance Validation: Calculates great-circle distance between truck GPS and bin location. Collection is permitted ONLY when d &lt;= 15.0 meters.</a:t>
+            </a:r>
+          </a:p>
+          <a:p>
+            <a:pPr>
+              <a:spcAft>
+                <a:spcPts val="600"/>
+              </a:spcAft>
+              <a:defRPr sz="1200">
                 <a:solidFill>
                   <a:srgbClr val="475569"/>
                 </a:solidFill>
@@ -4390,15 +4366,15 @@
               </a:defRPr>
             </a:pPr>
             <a:r>
-              <a:t>• Immutable Audit Trail Logging: Every collection and skip event records timestamp, vehicle registration, driver identity, and GPS tolerance accuracy (e.g., '5 meters - VALID').</a:t>
-            </a:r>
-          </a:p>
-          <a:p>
-            <a:pPr>
-              <a:spcAft>
-                <a:spcPts val="400"/>
-              </a:spcAft>
-              <a:defRPr sz="900">
+              <a:t>â¢ Immutable Audit Trail Logging: Every collection and skip event records timestamp, vehicle registration, driver identity, and GPS tolerance accuracy (e.g., '5 meters - VALID').</a:t>
+            </a:r>
+          </a:p>
+          <a:p>
+            <a:pPr>
+              <a:spcAft>
+                <a:spcPts val="600"/>
+              </a:spcAft>
+              <a:defRPr sz="1200">
                 <a:solidFill>
                   <a:srgbClr val="475569"/>
                 </a:solidFill>
@@ -4406,15 +4382,15 @@
               </a:defRPr>
             </a:pPr>
             <a:r>
-              <a:t>• Elimination of Service Falsification: Drivers cannot fabricate collection logs after hours; completion requires physical proximity and real-time photo verification.</a:t>
-            </a:r>
-          </a:p>
-          <a:p>
-            <a:pPr>
-              <a:spcAft>
-                <a:spcPts val="400"/>
-              </a:spcAft>
-              <a:defRPr sz="900">
+              <a:t>â¢ Elimination of Ghost Collections: Completely prevents post-shift log falsification; drivers must be physically present with geotagged photo proof.</a:t>
+            </a:r>
+          </a:p>
+          <a:p>
+            <a:pPr>
+              <a:spcAft>
+                <a:spcPts val="600"/>
+              </a:spcAft>
+              <a:defRPr sz="1200">
                 <a:solidFill>
                   <a:srgbClr val="475569"/>
                 </a:solidFill>
@@ -4422,7 +4398,7 @@
               </a:defRPr>
             </a:pPr>
             <a:r>
-              <a:t>• Automated Exception Flagging: Skipped stops are marked with categorized justifications and driver remarks for supervisor administrative audit.</a:t>
+              <a:t>â¢ Structured Exception Review: Bypassed bins are categorized with driver remarks and flagged in red on the supervisor map for administrative review.</a:t>
             </a:r>
           </a:p>
         </p:txBody>
@@ -4496,8 +4472,8 @@
         </p:nvSpPr>
         <p:spPr>
           <a:xfrm>
-            <a:off x="731520" y="365760"/>
-            <a:ext cx="4114800" cy="292608"/>
+            <a:off x="731520" y="347472"/>
+            <a:ext cx="4389120" cy="310896"/>
           </a:xfrm>
           <a:prstGeom prst="roundRect">
             <a:avLst/>
@@ -4530,7 +4506,7 @@
           <a:lstStyle/>
           <a:p>
             <a:pPr algn="ctr">
-              <a:defRPr sz="850" b="1">
+              <a:defRPr sz="950" b="1">
                 <a:solidFill>
                   <a:srgbClr val="2563EB"/>
                 </a:solidFill>
@@ -4538,7 +4514,7 @@
               </a:defRPr>
             </a:pPr>
             <a:r>
-              <a:t>11 | UML DESIGN</a:t>
+              <a:t>11 | SYSTEM DESIGN</a:t>
             </a:r>
           </a:p>
         </p:txBody>
@@ -4552,7 +4528,7 @@
         <p:spPr>
           <a:xfrm>
             <a:off x="731520" y="658368"/>
-            <a:ext cx="10698480" cy="594360"/>
+            <a:ext cx="10698480" cy="621792"/>
           </a:xfrm>
           <a:prstGeom prst="rect">
             <a:avLst/>
@@ -4566,7 +4542,7 @@
           <a:lstStyle/>
           <a:p>
             <a:pPr>
-              <a:defRPr sz="2100" b="1">
+              <a:defRPr sz="2200" b="1">
                 <a:solidFill>
                   <a:srgbClr val="0F172A"/>
                 </a:solidFill>
@@ -4574,7 +4550,7 @@
               </a:defRPr>
             </a:pPr>
             <a:r>
-              <a:t>UML Design: Structural &amp; Behavioral Software Models</a:t>
+              <a:t>System Design: Role-Based Actor Interaction Model</a:t>
             </a:r>
           </a:p>
         </p:txBody>
@@ -4587,7 +4563,7 @@
         </p:nvSpPr>
         <p:spPr>
           <a:xfrm>
-            <a:off x="731520" y="1298448"/>
+            <a:off x="731520" y="1316736"/>
             <a:ext cx="10728655" cy="18288"/>
           </a:xfrm>
           <a:prstGeom prst="rect">
@@ -4645,7 +4621,7 @@
           <a:lstStyle/>
           <a:p>
             <a:pPr>
-              <a:defRPr sz="800">
+              <a:defRPr sz="900">
                 <a:solidFill>
                   <a:srgbClr val="64748B"/>
                 </a:solidFill>
@@ -4675,7 +4651,7 @@
         <p:spPr>
           <a:xfrm>
             <a:off x="731520" y="1508760"/>
-            <a:ext cx="5212080" cy="3708595"/>
+            <a:ext cx="5486400" cy="3903785"/>
           </a:xfrm>
           <a:prstGeom prst="rect">
             <a:avLst/>
@@ -4690,8 +4666,8 @@
         </p:nvSpPr>
         <p:spPr>
           <a:xfrm>
-            <a:off x="6172200" y="1508760"/>
-            <a:ext cx="5287975" cy="4526280"/>
+            <a:off x="6400800" y="1508760"/>
+            <a:ext cx="5059375" cy="4572000"/>
           </a:xfrm>
           <a:prstGeom prst="roundRect">
             <a:avLst/>
@@ -4725,9 +4701,9 @@
           <a:p>
             <a:pPr algn="ctr">
               <a:spcAft>
-                <a:spcPts val="400"/>
-              </a:spcAft>
-              <a:defRPr sz="1200" b="1">
+                <a:spcPts val="600"/>
+              </a:spcAft>
+              <a:defRPr sz="1300" b="1">
                 <a:solidFill>
                   <a:srgbClr val="1E3A8A"/>
                 </a:solidFill>
@@ -4735,15 +4711,15 @@
               </a:defRPr>
             </a:pPr>
             <a:r>
-              <a:t>UML Architecture &amp; OO Models Breakdown</a:t>
-            </a:r>
-          </a:p>
-          <a:p>
-            <a:pPr>
-              <a:spcAft>
-                <a:spcPts val="400"/>
-              </a:spcAft>
-              <a:defRPr sz="900">
+              <a:t>Stakeholder Roles &amp; Core Capabilities</a:t>
+            </a:r>
+          </a:p>
+          <a:p>
+            <a:pPr>
+              <a:spcAft>
+                <a:spcPts val="800"/>
+              </a:spcAft>
+              <a:defRPr sz="1200">
                 <a:solidFill>
                   <a:srgbClr val="475569"/>
                 </a:solidFill>
@@ -4751,15 +4727,15 @@
               </a:defRPr>
             </a:pPr>
             <a:r>
-              <a:t>• Use Case Model (Figure 9.1): Defines 8 primary use cases spanning Driver (View Manifest, Mark Collected, Skip Stop), Citizen (Report Overflow, Track Status), and Supervisor (Live GIS Map, Verify Proof, Audit).</a:t>
-            </a:r>
-          </a:p>
-          <a:p>
-            <a:pPr>
-              <a:spcAft>
-                <a:spcPts val="400"/>
-              </a:spcAft>
-              <a:defRPr sz="900">
+              <a:t>â¢ Field Driver Role: Receives digital route manifest, validates pickup via 15m geofencing, captures camera photos, and logs road obstruction skips.</a:t>
+            </a:r>
+          </a:p>
+          <a:p>
+            <a:pPr>
+              <a:spcAft>
+                <a:spcPts val="800"/>
+              </a:spcAft>
+              <a:defRPr sz="1200">
                 <a:solidFill>
                   <a:srgbClr val="475569"/>
                 </a:solidFill>
@@ -4767,15 +4743,15 @@
               </a:defRPr>
             </a:pPr>
             <a:r>
-              <a:t>• Class Diagram Structure (Figure 10.1): Implements robust OOP principles with classes: Vehicle, StopCheckpoint, ProofOfService, CitizenComplaint, DriverUser, and SupervisorAdmin.</a:t>
-            </a:r>
-          </a:p>
-          <a:p>
-            <a:pPr>
-              <a:spcAft>
-                <a:spcPts val="400"/>
-              </a:spcAft>
-              <a:defRPr sz="900">
+              <a:t>â¢ Sanitation Supervisor Role: Monitors real-time vehicle fleet on GIS map, conducts route replays, reviews skipped stops, and validates daily completion KPIs.</a:t>
+            </a:r>
+          </a:p>
+          <a:p>
+            <a:pPr>
+              <a:spcAft>
+                <a:spcPts val="800"/>
+              </a:spcAft>
+              <a:defRPr sz="1200">
                 <a:solidFill>
                   <a:srgbClr val="475569"/>
                 </a:solidFill>
@@ -4783,15 +4759,15 @@
               </a:defRPr>
             </a:pPr>
             <a:r>
-              <a:t>• Sequence Diagram (Figure 10.2): Captures chronological message passing between Driver App, API Gateway, Haversine Validator, Database, and Supervisor Dashboard.</a:t>
-            </a:r>
-          </a:p>
-          <a:p>
-            <a:pPr>
-              <a:spcAft>
-                <a:spcPts val="400"/>
-              </a:spcAft>
-              <a:defRPr sz="900">
+              <a:t>â¢ Citizen Stakeholder Role: Submits geotagged garbage complaints with photos, tracks ticket resolution progress, and views ward collection schedules.</a:t>
+            </a:r>
+          </a:p>
+          <a:p>
+            <a:pPr>
+              <a:spcAft>
+                <a:spcPts val="800"/>
+              </a:spcAft>
+              <a:defRPr sz="1200">
                 <a:solidFill>
                   <a:srgbClr val="475569"/>
                 </a:solidFill>
@@ -4799,23 +4775,7 @@
               </a:defRPr>
             </a:pPr>
             <a:r>
-              <a:t>• Activity &amp; State Models (Figures 10.3 &amp; 10.4): Traces driver operational branching (Accessible vs Blocked) and checkpoint lifecycle states (Scheduled -&gt; In Progress -&gt; Collected / Skipped).</a:t>
-            </a:r>
-          </a:p>
-          <a:p>
-            <a:pPr>
-              <a:spcAft>
-                <a:spcPts val="400"/>
-              </a:spcAft>
-              <a:defRPr sz="900">
-                <a:solidFill>
-                  <a:srgbClr val="475569"/>
-                </a:solidFill>
-                <a:latin typeface="Segoe UI"/>
-              </a:defRPr>
-            </a:pPr>
-            <a:r>
-              <a:t>• Component &amp; Deployment Models (Figures 10.5 &amp; 10.6): Maps logical software components across physical runtime nodes (Driver Phone, Cloud Node.js Server, Database).</a:t>
+              <a:t>â¢ Automated Platform Engine: Enforces spatial geofence boundaries, processes live GPS telemetry, dispatches tickets, and generates tamper-resistant audit logs.</a:t>
             </a:r>
           </a:p>
         </p:txBody>
@@ -4889,8 +4849,8 @@
         </p:nvSpPr>
         <p:spPr>
           <a:xfrm>
-            <a:off x="731520" y="365760"/>
-            <a:ext cx="4114800" cy="292608"/>
+            <a:off x="731520" y="347472"/>
+            <a:ext cx="4389120" cy="310896"/>
           </a:xfrm>
           <a:prstGeom prst="roundRect">
             <a:avLst/>
@@ -4923,7 +4883,7 @@
           <a:lstStyle/>
           <a:p>
             <a:pPr algn="ctr">
-              <a:defRPr sz="850" b="1">
+              <a:defRPr sz="950" b="1">
                 <a:solidFill>
                   <a:srgbClr val="2563EB"/>
                 </a:solidFill>
@@ -4945,7 +4905,7 @@
         <p:spPr>
           <a:xfrm>
             <a:off x="731520" y="658368"/>
-            <a:ext cx="10698480" cy="594360"/>
+            <a:ext cx="10698480" cy="621792"/>
           </a:xfrm>
           <a:prstGeom prst="rect">
             <a:avLst/>
@@ -4959,7 +4919,7 @@
           <a:lstStyle/>
           <a:p>
             <a:pPr>
-              <a:defRPr sz="2100" b="1">
+              <a:defRPr sz="2200" b="1">
                 <a:solidFill>
                   <a:srgbClr val="0F172A"/>
                 </a:solidFill>
@@ -4967,7 +4927,7 @@
               </a:defRPr>
             </a:pPr>
             <a:r>
-              <a:t>System Testing &amp; Validation: Quality Assurance Suite</a:t>
+              <a:t>System Validation &amp; Quality Assurance Test Suite</a:t>
             </a:r>
           </a:p>
         </p:txBody>
@@ -4980,7 +4940,7 @@
         </p:nvSpPr>
         <p:spPr>
           <a:xfrm>
-            <a:off x="731520" y="1298448"/>
+            <a:off x="731520" y="1316736"/>
             <a:ext cx="10728655" cy="18288"/>
           </a:xfrm>
           <a:prstGeom prst="rect">
@@ -5038,7 +4998,7 @@
           <a:lstStyle/>
           <a:p>
             <a:pPr>
-              <a:defRPr sz="800">
+              <a:defRPr sz="900">
                 <a:solidFill>
                   <a:srgbClr val="64748B"/>
                 </a:solidFill>
@@ -5061,7 +5021,7 @@
         </p:nvGraphicFramePr>
         <p:xfrm>
           <a:off x="731520" y="1508760"/>
-          <a:ext cx="7498080" cy="4480560"/>
+          <a:ext cx="7498080" cy="4572000"/>
         </p:xfrm>
         <a:graphic>
           <a:graphicData uri="http://schemas.openxmlformats.org/drawingml/2006/table">
@@ -5076,14 +5036,14 @@
                 <a:gridCol w="1737360"/>
                 <a:gridCol w="731520"/>
               </a:tblGrid>
-              <a:tr h="497840">
+              <a:tr h="762000">
                 <a:tc>
                   <a:txBody>
                     <a:bodyPr/>
                     <a:lstStyle/>
                     <a:p>
                       <a:pPr>
-                        <a:defRPr sz="950" b="1">
+                        <a:defRPr sz="1100" b="1">
                           <a:solidFill>
                             <a:srgbClr val="1E3A8A"/>
                           </a:solidFill>
@@ -5107,7 +5067,7 @@
                     <a:lstStyle/>
                     <a:p>
                       <a:pPr>
-                        <a:defRPr sz="950" b="1">
+                        <a:defRPr sz="1100" b="1">
                           <a:solidFill>
                             <a:srgbClr val="1E3A8A"/>
                           </a:solidFill>
@@ -5131,7 +5091,7 @@
                     <a:lstStyle/>
                     <a:p>
                       <a:pPr>
-                        <a:defRPr sz="950" b="1">
+                        <a:defRPr sz="1100" b="1">
                           <a:solidFill>
                             <a:srgbClr val="1E3A8A"/>
                           </a:solidFill>
@@ -5155,7 +5115,7 @@
                     <a:lstStyle/>
                     <a:p>
                       <a:pPr>
-                        <a:defRPr sz="950" b="1">
+                        <a:defRPr sz="1100" b="1">
                           <a:solidFill>
                             <a:srgbClr val="1E3A8A"/>
                           </a:solidFill>
@@ -5179,7 +5139,7 @@
                     <a:lstStyle/>
                     <a:p>
                       <a:pPr>
-                        <a:defRPr sz="950" b="1">
+                        <a:defRPr sz="1100" b="1">
                           <a:solidFill>
                             <a:srgbClr val="1E3A8A"/>
                           </a:solidFill>
@@ -5198,14 +5158,14 @@
                   </a:tcPr>
                 </a:tc>
               </a:tr>
-              <a:tr h="497840">
+              <a:tr h="762000">
                 <a:tc>
                   <a:txBody>
                     <a:bodyPr/>
                     <a:lstStyle/>
                     <a:p>
                       <a:pPr>
-                        <a:defRPr sz="850">
+                        <a:defRPr sz="1100">
                           <a:solidFill>
                             <a:srgbClr val="475569"/>
                           </a:solidFill>
@@ -5229,7 +5189,7 @@
                     <a:lstStyle/>
                     <a:p>
                       <a:pPr>
-                        <a:defRPr sz="850">
+                        <a:defRPr sz="1100">
                           <a:solidFill>
                             <a:srgbClr val="475569"/>
                           </a:solidFill>
@@ -5237,7 +5197,7 @@
                         </a:defRPr>
                       </a:pPr>
                       <a:r>
-                        <a:t>Valid Role Authentication</a:t>
+                        <a:t>Role-Based Authentication</a:t>
                       </a:r>
                     </a:p>
                   </a:txBody>
@@ -5253,7 +5213,7 @@
                     <a:lstStyle/>
                     <a:p>
                       <a:pPr>
-                        <a:defRPr sz="850">
+                        <a:defRPr sz="1100">
                           <a:solidFill>
                             <a:srgbClr val="475569"/>
                           </a:solidFill>
@@ -5261,7 +5221,7 @@
                         </a:defRPr>
                       </a:pPr>
                       <a:r>
-                        <a:t>EmpID: EMP-088, Pass: Valid</a:t>
+                        <a:t>EmpID: EMP-088, Valid Key</a:t>
                       </a:r>
                     </a:p>
                   </a:txBody>
@@ -5277,7 +5237,7 @@
                     <a:lstStyle/>
                     <a:p>
                       <a:pPr>
-                        <a:defRPr sz="850">
+                        <a:defRPr sz="1100">
                           <a:solidFill>
                             <a:srgbClr val="475569"/>
                           </a:solidFill>
@@ -5285,7 +5245,7 @@
                         </a:defRPr>
                       </a:pPr>
                       <a:r>
-                        <a:t>Redirects to Supervisor GIS Map</a:t>
+                        <a:t>Access granted to GIS dashboard</a:t>
                       </a:r>
                     </a:p>
                   </a:txBody>
@@ -5301,7 +5261,7 @@
                     <a:lstStyle/>
                     <a:p>
                       <a:pPr>
-                        <a:defRPr sz="850" b="1">
+                        <a:defRPr sz="1100" b="1">
                           <a:solidFill>
                             <a:srgbClr val="10B981"/>
                           </a:solidFill>
@@ -5320,14 +5280,14 @@
                   </a:tcPr>
                 </a:tc>
               </a:tr>
-              <a:tr h="497840">
+              <a:tr h="762000">
                 <a:tc>
                   <a:txBody>
                     <a:bodyPr/>
                     <a:lstStyle/>
                     <a:p>
                       <a:pPr>
-                        <a:defRPr sz="850">
+                        <a:defRPr sz="1100">
                           <a:solidFill>
                             <a:srgbClr val="475569"/>
                           </a:solidFill>
@@ -5351,7 +5311,7 @@
                     <a:lstStyle/>
                     <a:p>
                       <a:pPr>
-                        <a:defRPr sz="850">
+                        <a:defRPr sz="1100">
                           <a:solidFill>
                             <a:srgbClr val="475569"/>
                           </a:solidFill>
@@ -5359,7 +5319,7 @@
                         </a:defRPr>
                       </a:pPr>
                       <a:r>
-                        <a:t>Invalid Credentials Handling</a:t>
+                        <a:t>Live GPS Telemetry Stream</a:t>
                       </a:r>
                     </a:p>
                   </a:txBody>
@@ -5375,7 +5335,7 @@
                     <a:lstStyle/>
                     <a:p>
                       <a:pPr>
-                        <a:defRPr sz="850">
+                        <a:defRPr sz="1100">
                           <a:solidFill>
                             <a:srgbClr val="475569"/>
                           </a:solidFill>
@@ -5383,7 +5343,7 @@
                         </a:defRPr>
                       </a:pPr>
                       <a:r>
-                        <a:t>EmpID: EMP-088, Pass: Wrong</a:t>
+                        <a:t>Lat: 17.8974, Lng: 83.4485</a:t>
                       </a:r>
                     </a:p>
                   </a:txBody>
@@ -5399,7 +5359,7 @@
                     <a:lstStyle/>
                     <a:p>
                       <a:pPr>
-                        <a:defRPr sz="850">
+                        <a:defRPr sz="1100">
                           <a:solidFill>
                             <a:srgbClr val="475569"/>
                           </a:solidFill>
@@ -5407,7 +5367,7 @@
                         </a:defRPr>
                       </a:pPr>
                       <a:r>
-                        <a:t>Access Denied; clear error message</a:t>
+                        <a:t>Vehicle marker moves at 24 km/h</a:t>
                       </a:r>
                     </a:p>
                   </a:txBody>
@@ -5423,7 +5383,7 @@
                     <a:lstStyle/>
                     <a:p>
                       <a:pPr>
-                        <a:defRPr sz="850" b="1">
+                        <a:defRPr sz="1100" b="1">
                           <a:solidFill>
                             <a:srgbClr val="10B981"/>
                           </a:solidFill>
@@ -5442,14 +5402,14 @@
                   </a:tcPr>
                 </a:tc>
               </a:tr>
-              <a:tr h="497840">
+              <a:tr h="762000">
                 <a:tc>
                   <a:txBody>
                     <a:bodyPr/>
                     <a:lstStyle/>
                     <a:p>
                       <a:pPr>
-                        <a:defRPr sz="850">
+                        <a:defRPr sz="1100">
                           <a:solidFill>
                             <a:srgbClr val="475569"/>
                           </a:solidFill>
@@ -5473,7 +5433,7 @@
                     <a:lstStyle/>
                     <a:p>
                       <a:pPr>
-                        <a:defRPr sz="850">
+                        <a:defRPr sz="1100">
                           <a:solidFill>
                             <a:srgbClr val="475569"/>
                           </a:solidFill>
@@ -5481,7 +5441,7 @@
                         </a:defRPr>
                       </a:pPr>
                       <a:r>
-                        <a:t>Live GPS Telemetry Update</a:t>
+                        <a:t>Geofenced Proof Collection</a:t>
                       </a:r>
                     </a:p>
                   </a:txBody>
@@ -5497,7 +5457,7 @@
                     <a:lstStyle/>
                     <a:p>
                       <a:pPr>
-                        <a:defRPr sz="850">
+                        <a:defRPr sz="1100">
                           <a:solidFill>
                             <a:srgbClr val="475569"/>
                           </a:solidFill>
@@ -5505,7 +5465,7 @@
                         </a:defRPr>
                       </a:pPr>
                       <a:r>
-                        <a:t>Lat: 17.8974, Lng: 83.4485</a:t>
+                        <a:t>Proximity: 5m &lt;= 15m radius</a:t>
                       </a:r>
                     </a:p>
                   </a:txBody>
@@ -5521,7 +5481,7 @@
                     <a:lstStyle/>
                     <a:p>
                       <a:pPr>
-                        <a:defRPr sz="850">
+                        <a:defRPr sz="1100">
                           <a:solidFill>
                             <a:srgbClr val="475569"/>
                           </a:solidFill>
@@ -5529,7 +5489,7 @@
                         </a:defRPr>
                       </a:pPr>
                       <a:r>
-                        <a:t>Truck marker moves; 24 km/h logged</a:t>
+                        <a:t>Stop marked 'Collected' with photo</a:t>
                       </a:r>
                     </a:p>
                   </a:txBody>
@@ -5545,7 +5505,7 @@
                     <a:lstStyle/>
                     <a:p>
                       <a:pPr>
-                        <a:defRPr sz="850" b="1">
+                        <a:defRPr sz="1100" b="1">
                           <a:solidFill>
                             <a:srgbClr val="10B981"/>
                           </a:solidFill>
@@ -5564,14 +5524,14 @@
                   </a:tcPr>
                 </a:tc>
               </a:tr>
-              <a:tr h="497840">
+              <a:tr h="762000">
                 <a:tc>
                   <a:txBody>
                     <a:bodyPr/>
                     <a:lstStyle/>
                     <a:p>
                       <a:pPr>
-                        <a:defRPr sz="850">
+                        <a:defRPr sz="1100">
                           <a:solidFill>
                             <a:srgbClr val="475569"/>
                           </a:solidFill>
@@ -5595,7 +5555,7 @@
                     <a:lstStyle/>
                     <a:p>
                       <a:pPr>
-                        <a:defRPr sz="850">
+                        <a:defRPr sz="1100">
                           <a:solidFill>
                             <a:srgbClr val="475569"/>
                           </a:solidFill>
@@ -5603,7 +5563,7 @@
                         </a:defRPr>
                       </a:pPr>
                       <a:r>
-                        <a:t>Geofenced Proof Collection</a:t>
+                        <a:t>Out-of-Bounds Block Check</a:t>
                       </a:r>
                     </a:p>
                   </a:txBody>
@@ -5619,7 +5579,7 @@
                     <a:lstStyle/>
                     <a:p>
                       <a:pPr>
-                        <a:defRPr sz="850">
+                        <a:defRPr sz="1100">
                           <a:solidFill>
                             <a:srgbClr val="475569"/>
                           </a:solidFill>
@@ -5627,7 +5587,7 @@
                         </a:defRPr>
                       </a:pPr>
                       <a:r>
-                        <a:t>Proximity: 5m &lt;= 15m radius</a:t>
+                        <a:t>Proximity: 450m &gt; 15m radius</a:t>
                       </a:r>
                     </a:p>
                   </a:txBody>
@@ -5643,7 +5603,7 @@
                     <a:lstStyle/>
                     <a:p>
                       <a:pPr>
-                        <a:defRPr sz="850">
+                        <a:defRPr sz="1100">
                           <a:solidFill>
                             <a:srgbClr val="475569"/>
                           </a:solidFill>
@@ -5651,7 +5611,7 @@
                         </a:defRPr>
                       </a:pPr>
                       <a:r>
-                        <a:t>Stop marked 'Collected'; proof stored</a:t>
+                        <a:t>Action blocked; alert displayed</a:t>
                       </a:r>
                     </a:p>
                   </a:txBody>
@@ -5667,7 +5627,7 @@
                     <a:lstStyle/>
                     <a:p>
                       <a:pPr>
-                        <a:defRPr sz="850" b="1">
+                        <a:defRPr sz="1100" b="1">
                           <a:solidFill>
                             <a:srgbClr val="10B981"/>
                           </a:solidFill>
@@ -5686,14 +5646,14 @@
                   </a:tcPr>
                 </a:tc>
               </a:tr>
-              <a:tr h="497840">
+              <a:tr h="762000">
                 <a:tc>
                   <a:txBody>
                     <a:bodyPr/>
                     <a:lstStyle/>
                     <a:p>
                       <a:pPr>
-                        <a:defRPr sz="850">
+                        <a:defRPr sz="1100">
                           <a:solidFill>
                             <a:srgbClr val="475569"/>
                           </a:solidFill>
@@ -5717,7 +5677,7 @@
                     <a:lstStyle/>
                     <a:p>
                       <a:pPr>
-                        <a:defRPr sz="850">
+                        <a:defRPr sz="1100">
                           <a:solidFill>
                             <a:srgbClr val="475569"/>
                           </a:solidFill>
@@ -5725,7 +5685,7 @@
                         </a:defRPr>
                       </a:pPr>
                       <a:r>
-                        <a:t>Out-of-Bounds Block Check</a:t>
+                        <a:t>Citizen Grievance Lifecycle</a:t>
                       </a:r>
                     </a:p>
                   </a:txBody>
@@ -5741,7 +5701,7 @@
                     <a:lstStyle/>
                     <a:p>
                       <a:pPr>
-                        <a:defRPr sz="850">
+                        <a:defRPr sz="1100">
                           <a:solidFill>
                             <a:srgbClr val="475569"/>
                           </a:solidFill>
@@ -5749,7 +5709,7 @@
                         </a:defRPr>
                       </a:pPr>
                       <a:r>
-                        <a:t>Proximity: 450m &gt; 15m radius</a:t>
+                        <a:t>Name, GPS Pin, Overflow Photo</a:t>
                       </a:r>
                     </a:p>
                   </a:txBody>
@@ -5765,7 +5725,7 @@
                     <a:lstStyle/>
                     <a:p>
                       <a:pPr>
-                        <a:defRPr sz="850">
+                        <a:defRPr sz="1100">
                           <a:solidFill>
                             <a:srgbClr val="475569"/>
                           </a:solidFill>
@@ -5773,7 +5733,7 @@
                         </a:defRPr>
                       </a:pPr>
                       <a:r>
-                        <a:t>Blocks collection; error alert shown</a:t>
+                        <a:t>Ticket generated (#CMP-2026-106)</a:t>
                       </a:r>
                     </a:p>
                   </a:txBody>
@@ -5789,7 +5749,7 @@
                     <a:lstStyle/>
                     <a:p>
                       <a:pPr>
-                        <a:defRPr sz="850" b="1">
+                        <a:defRPr sz="1100" b="1">
                           <a:solidFill>
                             <a:srgbClr val="10B981"/>
                           </a:solidFill>
@@ -5808,372 +5768,6 @@
                   </a:tcPr>
                 </a:tc>
               </a:tr>
-              <a:tr h="497840">
-                <a:tc>
-                  <a:txBody>
-                    <a:bodyPr/>
-                    <a:lstStyle/>
-                    <a:p>
-                      <a:pPr>
-                        <a:defRPr sz="850">
-                          <a:solidFill>
-                            <a:srgbClr val="475569"/>
-                          </a:solidFill>
-                          <a:latin typeface="Segoe UI"/>
-                        </a:defRPr>
-                      </a:pPr>
-                      <a:r>
-                        <a:t>TC06</a:t>
-                      </a:r>
-                    </a:p>
-                  </a:txBody>
-                  <a:tcPr>
-                    <a:solidFill>
-                      <a:srgbClr val="F8FAFC"/>
-                    </a:solidFill>
-                  </a:tcPr>
-                </a:tc>
-                <a:tc>
-                  <a:txBody>
-                    <a:bodyPr/>
-                    <a:lstStyle/>
-                    <a:p>
-                      <a:pPr>
-                        <a:defRPr sz="850">
-                          <a:solidFill>
-                            <a:srgbClr val="475569"/>
-                          </a:solidFill>
-                          <a:latin typeface="Segoe UI"/>
-                        </a:defRPr>
-                      </a:pPr>
-                      <a:r>
-                        <a:t>Structured Skip Stop Log</a:t>
-                      </a:r>
-                    </a:p>
-                  </a:txBody>
-                  <a:tcPr>
-                    <a:solidFill>
-                      <a:srgbClr val="F8FAFC"/>
-                    </a:solidFill>
-                  </a:tcPr>
-                </a:tc>
-                <a:tc>
-                  <a:txBody>
-                    <a:bodyPr/>
-                    <a:lstStyle/>
-                    <a:p>
-                      <a:pPr>
-                        <a:defRPr sz="850">
-                          <a:solidFill>
-                            <a:srgbClr val="475569"/>
-                          </a:solidFill>
-                          <a:latin typeface="Segoe UI"/>
-                        </a:defRPr>
-                      </a:pPr>
-                      <a:r>
-                        <a:t>Reason: Road excavation logged</a:t>
-                      </a:r>
-                    </a:p>
-                  </a:txBody>
-                  <a:tcPr>
-                    <a:solidFill>
-                      <a:srgbClr val="F8FAFC"/>
-                    </a:solidFill>
-                  </a:tcPr>
-                </a:tc>
-                <a:tc>
-                  <a:txBody>
-                    <a:bodyPr/>
-                    <a:lstStyle/>
-                    <a:p>
-                      <a:pPr>
-                        <a:defRPr sz="850">
-                          <a:solidFill>
-                            <a:srgbClr val="475569"/>
-                          </a:solidFill>
-                          <a:latin typeface="Segoe UI"/>
-                        </a:defRPr>
-                      </a:pPr>
-                      <a:r>
-                        <a:t>Stop flagged 'Skipped'; red icon on map</a:t>
-                      </a:r>
-                    </a:p>
-                  </a:txBody>
-                  <a:tcPr>
-                    <a:solidFill>
-                      <a:srgbClr val="F8FAFC"/>
-                    </a:solidFill>
-                  </a:tcPr>
-                </a:tc>
-                <a:tc>
-                  <a:txBody>
-                    <a:bodyPr/>
-                    <a:lstStyle/>
-                    <a:p>
-                      <a:pPr>
-                        <a:defRPr sz="850" b="1">
-                          <a:solidFill>
-                            <a:srgbClr val="10B981"/>
-                          </a:solidFill>
-                          <a:latin typeface="Segoe UI"/>
-                        </a:defRPr>
-                      </a:pPr>
-                      <a:r>
-                        <a:t>PASS</a:t>
-                      </a:r>
-                    </a:p>
-                  </a:txBody>
-                  <a:tcPr>
-                    <a:solidFill>
-                      <a:srgbClr val="F8FAFC"/>
-                    </a:solidFill>
-                  </a:tcPr>
-                </a:tc>
-              </a:tr>
-              <a:tr h="497840">
-                <a:tc>
-                  <a:txBody>
-                    <a:bodyPr/>
-                    <a:lstStyle/>
-                    <a:p>
-                      <a:pPr>
-                        <a:defRPr sz="850">
-                          <a:solidFill>
-                            <a:srgbClr val="475569"/>
-                          </a:solidFill>
-                          <a:latin typeface="Segoe UI"/>
-                        </a:defRPr>
-                      </a:pPr>
-                      <a:r>
-                        <a:t>TC07</a:t>
-                      </a:r>
-                    </a:p>
-                  </a:txBody>
-                  <a:tcPr>
-                    <a:solidFill>
-                      <a:srgbClr val="FFFFFF"/>
-                    </a:solidFill>
-                  </a:tcPr>
-                </a:tc>
-                <a:tc>
-                  <a:txBody>
-                    <a:bodyPr/>
-                    <a:lstStyle/>
-                    <a:p>
-                      <a:pPr>
-                        <a:defRPr sz="850">
-                          <a:solidFill>
-                            <a:srgbClr val="475569"/>
-                          </a:solidFill>
-                          <a:latin typeface="Segoe UI"/>
-                        </a:defRPr>
-                      </a:pPr>
-                      <a:r>
-                        <a:t>Citizen Grievance Submission</a:t>
-                      </a:r>
-                    </a:p>
-                  </a:txBody>
-                  <a:tcPr>
-                    <a:solidFill>
-                      <a:srgbClr val="FFFFFF"/>
-                    </a:solidFill>
-                  </a:tcPr>
-                </a:tc>
-                <a:tc>
-                  <a:txBody>
-                    <a:bodyPr/>
-                    <a:lstStyle/>
-                    <a:p>
-                      <a:pPr>
-                        <a:defRPr sz="850">
-                          <a:solidFill>
-                            <a:srgbClr val="475569"/>
-                          </a:solidFill>
-                          <a:latin typeface="Segoe UI"/>
-                        </a:defRPr>
-                      </a:pPr>
-                      <a:r>
-                        <a:t>Name, Phone, GPS Pin, Photo</a:t>
-                      </a:r>
-                    </a:p>
-                  </a:txBody>
-                  <a:tcPr>
-                    <a:solidFill>
-                      <a:srgbClr val="FFFFFF"/>
-                    </a:solidFill>
-                  </a:tcPr>
-                </a:tc>
-                <a:tc>
-                  <a:txBody>
-                    <a:bodyPr/>
-                    <a:lstStyle/>
-                    <a:p>
-                      <a:pPr>
-                        <a:defRPr sz="850">
-                          <a:solidFill>
-                            <a:srgbClr val="475569"/>
-                          </a:solidFill>
-                          <a:latin typeface="Segoe UI"/>
-                        </a:defRPr>
-                      </a:pPr>
-                      <a:r>
-                        <a:t>Ticket generated (CMP-2026-106)</a:t>
-                      </a:r>
-                    </a:p>
-                  </a:txBody>
-                  <a:tcPr>
-                    <a:solidFill>
-                      <a:srgbClr val="FFFFFF"/>
-                    </a:solidFill>
-                  </a:tcPr>
-                </a:tc>
-                <a:tc>
-                  <a:txBody>
-                    <a:bodyPr/>
-                    <a:lstStyle/>
-                    <a:p>
-                      <a:pPr>
-                        <a:defRPr sz="850" b="1">
-                          <a:solidFill>
-                            <a:srgbClr val="10B981"/>
-                          </a:solidFill>
-                          <a:latin typeface="Segoe UI"/>
-                        </a:defRPr>
-                      </a:pPr>
-                      <a:r>
-                        <a:t>PASS</a:t>
-                      </a:r>
-                    </a:p>
-                  </a:txBody>
-                  <a:tcPr>
-                    <a:solidFill>
-                      <a:srgbClr val="FFFFFF"/>
-                    </a:solidFill>
-                  </a:tcPr>
-                </a:tc>
-              </a:tr>
-              <a:tr h="497840">
-                <a:tc>
-                  <a:txBody>
-                    <a:bodyPr/>
-                    <a:lstStyle/>
-                    <a:p>
-                      <a:pPr>
-                        <a:defRPr sz="850">
-                          <a:solidFill>
-                            <a:srgbClr val="475569"/>
-                          </a:solidFill>
-                          <a:latin typeface="Segoe UI"/>
-                        </a:defRPr>
-                      </a:pPr>
-                      <a:r>
-                        <a:t>TC08</a:t>
-                      </a:r>
-                    </a:p>
-                  </a:txBody>
-                  <a:tcPr>
-                    <a:solidFill>
-                      <a:srgbClr val="F8FAFC"/>
-                    </a:solidFill>
-                  </a:tcPr>
-                </a:tc>
-                <a:tc>
-                  <a:txBody>
-                    <a:bodyPr/>
-                    <a:lstStyle/>
-                    <a:p>
-                      <a:pPr>
-                        <a:defRPr sz="850">
-                          <a:solidFill>
-                            <a:srgbClr val="475569"/>
-                          </a:solidFill>
-                          <a:latin typeface="Segoe UI"/>
-                        </a:defRPr>
-                      </a:pPr>
-                      <a:r>
-                        <a:t>Live Ticket Status Tracking</a:t>
-                      </a:r>
-                    </a:p>
-                  </a:txBody>
-                  <a:tcPr>
-                    <a:solidFill>
-                      <a:srgbClr val="F8FAFC"/>
-                    </a:solidFill>
-                  </a:tcPr>
-                </a:tc>
-                <a:tc>
-                  <a:txBody>
-                    <a:bodyPr/>
-                    <a:lstStyle/>
-                    <a:p>
-                      <a:pPr>
-                        <a:defRPr sz="850">
-                          <a:solidFill>
-                            <a:srgbClr val="475569"/>
-                          </a:solidFill>
-                          <a:latin typeface="Segoe UI"/>
-                        </a:defRPr>
-                      </a:pPr>
-                      <a:r>
-                        <a:t>Ticket ID: CMP-2026-104</a:t>
-                      </a:r>
-                    </a:p>
-                  </a:txBody>
-                  <a:tcPr>
-                    <a:solidFill>
-                      <a:srgbClr val="F8FAFC"/>
-                    </a:solidFill>
-                  </a:tcPr>
-                </a:tc>
-                <a:tc>
-                  <a:txBody>
-                    <a:bodyPr/>
-                    <a:lstStyle/>
-                    <a:p>
-                      <a:pPr>
-                        <a:defRPr sz="850">
-                          <a:solidFill>
-                            <a:srgbClr val="475569"/>
-                          </a:solidFill>
-                          <a:latin typeface="Segoe UI"/>
-                        </a:defRPr>
-                      </a:pPr>
-                      <a:r>
-                        <a:t>3-stage timeline rendered correctly</a:t>
-                      </a:r>
-                    </a:p>
-                  </a:txBody>
-                  <a:tcPr>
-                    <a:solidFill>
-                      <a:srgbClr val="F8FAFC"/>
-                    </a:solidFill>
-                  </a:tcPr>
-                </a:tc>
-                <a:tc>
-                  <a:txBody>
-                    <a:bodyPr/>
-                    <a:lstStyle/>
-                    <a:p>
-                      <a:pPr>
-                        <a:defRPr sz="850" b="1">
-                          <a:solidFill>
-                            <a:srgbClr val="10B981"/>
-                          </a:solidFill>
-                          <a:latin typeface="Segoe UI"/>
-                        </a:defRPr>
-                      </a:pPr>
-                      <a:r>
-                        <a:t>PASS</a:t>
-                      </a:r>
-                    </a:p>
-                  </a:txBody>
-                  <a:tcPr>
-                    <a:solidFill>
-                      <a:srgbClr val="F8FAFC"/>
-                    </a:solidFill>
-                  </a:tcPr>
-                </a:tc>
-              </a:tr>
             </a:tbl>
           </a:graphicData>
         </a:graphic>
@@ -6187,7 +5781,7 @@
         <p:spPr>
           <a:xfrm>
             <a:off x="8412480" y="1508760"/>
-            <a:ext cx="3047695" cy="4480560"/>
+            <a:ext cx="3047695" cy="4572000"/>
           </a:xfrm>
           <a:prstGeom prst="roundRect">
             <a:avLst/>
@@ -6221,9 +5815,9 @@
           <a:p>
             <a:pPr algn="ctr">
               <a:spcAft>
-                <a:spcPts val="400"/>
-              </a:spcAft>
-              <a:defRPr sz="1200" b="1">
+                <a:spcPts val="600"/>
+              </a:spcAft>
+              <a:defRPr sz="1300" b="1">
                 <a:solidFill>
                   <a:srgbClr val="1E3A8A"/>
                 </a:solidFill>
@@ -6231,15 +5825,15 @@
               </a:defRPr>
             </a:pPr>
             <a:r>
-              <a:t>Quality Assurance Metrics</a:t>
-            </a:r>
-          </a:p>
-          <a:p>
-            <a:pPr>
-              <a:spcAft>
-                <a:spcPts val="600"/>
-              </a:spcAft>
-              <a:defRPr sz="950">
+              <a:t>Quality Assurance Benchmarks</a:t>
+            </a:r>
+          </a:p>
+          <a:p>
+            <a:pPr>
+              <a:spcAft>
+                <a:spcPts val="800"/>
+              </a:spcAft>
+              <a:defRPr sz="1200">
                 <a:solidFill>
                   <a:srgbClr val="475569"/>
                 </a:solidFill>
@@ -6247,15 +5841,15 @@
               </a:defRPr>
             </a:pPr>
             <a:r>
-              <a:t>• 100% Test Pass Rate: All 8 core system test cases executed with zero defects across modules.</a:t>
-            </a:r>
-          </a:p>
-          <a:p>
-            <a:pPr>
-              <a:spcAft>
-                <a:spcPts val="600"/>
-              </a:spcAft>
-              <a:defRPr sz="950">
+              <a:t>â¢ 100% Test Pass Rate: All primary operational workflows executed with zero defects across modules.</a:t>
+            </a:r>
+          </a:p>
+          <a:p>
+            <a:pPr>
+              <a:spcAft>
+                <a:spcPts val="800"/>
+              </a:spcAft>
+              <a:defRPr sz="1200">
                 <a:solidFill>
                   <a:srgbClr val="475569"/>
                 </a:solidFill>
@@ -6263,15 +5857,15 @@
               </a:defRPr>
             </a:pPr>
             <a:r>
-              <a:t>• Sub-250ms API Latency: Stateless REST endpoints respond in under 250ms under concurrent requests.</a:t>
-            </a:r>
-          </a:p>
-          <a:p>
-            <a:pPr>
-              <a:spcAft>
-                <a:spcPts val="600"/>
-              </a:spcAft>
-              <a:defRPr sz="950">
+              <a:t>â¢ Sub-250ms API Latency: Stateless REST endpoints respond in under 250ms under concurrent requests.</a:t>
+            </a:r>
+          </a:p>
+          <a:p>
+            <a:pPr>
+              <a:spcAft>
+                <a:spcPts val="800"/>
+              </a:spcAft>
+              <a:defRPr sz="1200">
                 <a:solidFill>
                   <a:srgbClr val="475569"/>
                 </a:solidFill>
@@ -6279,15 +5873,15 @@
               </a:defRPr>
             </a:pPr>
             <a:r>
-              <a:t>• Sub-10m GPS Precision: Field testing confirmed high-precision geofencing matching using smartphone A-GPS.</a:t>
-            </a:r>
-          </a:p>
-          <a:p>
-            <a:pPr>
-              <a:spcAft>
-                <a:spcPts val="600"/>
-              </a:spcAft>
-              <a:defRPr sz="950">
+              <a:t>â¢ Sub-10m GPS Precision: Field testing confirmed high-accuracy geofencing using commodity smartphone A-GPS.</a:t>
+            </a:r>
+          </a:p>
+          <a:p>
+            <a:pPr>
+              <a:spcAft>
+                <a:spcPts val="800"/>
+              </a:spcAft>
+              <a:defRPr sz="1200">
                 <a:solidFill>
                   <a:srgbClr val="475569"/>
                 </a:solidFill>
@@ -6295,7 +5889,7 @@
               </a:defRPr>
             </a:pPr>
             <a:r>
-              <a:t>• Boundary Edge Testing: Verified basis paths for boundary violations (&gt;15m) and offline local storage buffering.</a:t>
+              <a:t>â¢ Edge Case Handling: Verified out-of-bounds rejection, camera permission denial, and offline retry logic.</a:t>
             </a:r>
           </a:p>
         </p:txBody>
@@ -6369,8 +5963,8 @@
         </p:nvSpPr>
         <p:spPr>
           <a:xfrm>
-            <a:off x="731520" y="365760"/>
-            <a:ext cx="4114800" cy="292608"/>
+            <a:off x="731520" y="347472"/>
+            <a:ext cx="4389120" cy="310896"/>
           </a:xfrm>
           <a:prstGeom prst="roundRect">
             <a:avLst/>
@@ -6403,7 +5997,7 @@
           <a:lstStyle/>
           <a:p>
             <a:pPr algn="ctr">
-              <a:defRPr sz="850" b="1">
+              <a:defRPr sz="950" b="1">
                 <a:solidFill>
                   <a:srgbClr val="2563EB"/>
                 </a:solidFill>
@@ -6425,7 +6019,7 @@
         <p:spPr>
           <a:xfrm>
             <a:off x="731520" y="658368"/>
-            <a:ext cx="10698480" cy="594360"/>
+            <a:ext cx="10698480" cy="621792"/>
           </a:xfrm>
           <a:prstGeom prst="rect">
             <a:avLst/>
@@ -6439,7 +6033,7 @@
           <a:lstStyle/>
           <a:p>
             <a:pPr>
-              <a:defRPr sz="2100" b="1">
+              <a:defRPr sz="2200" b="1">
                 <a:solidFill>
                   <a:srgbClr val="0F172A"/>
                 </a:solidFill>
@@ -6460,7 +6054,7 @@
         </p:nvSpPr>
         <p:spPr>
           <a:xfrm>
-            <a:off x="731520" y="1298448"/>
+            <a:off x="731520" y="1316736"/>
             <a:ext cx="10728655" cy="18288"/>
           </a:xfrm>
           <a:prstGeom prst="rect">
@@ -6518,7 +6112,7 @@
           <a:lstStyle/>
           <a:p>
             <a:pPr>
-              <a:defRPr sz="800">
+              <a:defRPr sz="900">
                 <a:solidFill>
                   <a:srgbClr val="64748B"/>
                 </a:solidFill>
@@ -6541,7 +6135,7 @@
         </p:nvGraphicFramePr>
         <p:xfrm>
           <a:off x="731520" y="1508760"/>
-          <a:ext cx="10728655" cy="3931920"/>
+          <a:ext cx="10728655" cy="4023360"/>
         </p:xfrm>
         <a:graphic>
           <a:graphicData uri="http://schemas.openxmlformats.org/drawingml/2006/table">
@@ -6555,14 +6149,14 @@
                 <a:gridCol w="2743200"/>
                 <a:gridCol w="2773375"/>
               </a:tblGrid>
-              <a:tr h="491490">
+              <a:tr h="502920">
                 <a:tc>
                   <a:txBody>
                     <a:bodyPr/>
                     <a:lstStyle/>
                     <a:p>
                       <a:pPr>
-                        <a:defRPr sz="1000" b="1">
+                        <a:defRPr sz="1100" b="1">
                           <a:solidFill>
                             <a:srgbClr val="1E3A8A"/>
                           </a:solidFill>
@@ -6586,7 +6180,7 @@
                     <a:lstStyle/>
                     <a:p>
                       <a:pPr>
-                        <a:defRPr sz="1000" b="1">
+                        <a:defRPr sz="1100" b="1">
                           <a:solidFill>
                             <a:srgbClr val="1E3A8A"/>
                           </a:solidFill>
@@ -6610,7 +6204,7 @@
                     <a:lstStyle/>
                     <a:p>
                       <a:pPr>
-                        <a:defRPr sz="1000" b="1">
+                        <a:defRPr sz="1100" b="1">
                           <a:solidFill>
                             <a:srgbClr val="1E3A8A"/>
                           </a:solidFill>
@@ -6634,7 +6228,7 @@
                     <a:lstStyle/>
                     <a:p>
                       <a:pPr>
-                        <a:defRPr sz="1000" b="1">
+                        <a:defRPr sz="1100" b="1">
                           <a:solidFill>
                             <a:srgbClr val="FFFFFF"/>
                           </a:solidFill>
@@ -6653,14 +6247,14 @@
                   </a:tcPr>
                 </a:tc>
               </a:tr>
-              <a:tr h="491490">
+              <a:tr h="502920">
                 <a:tc>
                   <a:txBody>
                     <a:bodyPr/>
                     <a:lstStyle/>
                     <a:p>
                       <a:pPr>
-                        <a:defRPr sz="900">
+                        <a:defRPr sz="1100">
                           <a:solidFill>
                             <a:srgbClr val="475569"/>
                           </a:solidFill>
@@ -6684,7 +6278,7 @@
                     <a:lstStyle/>
                     <a:p>
                       <a:pPr>
-                        <a:defRPr sz="900">
+                        <a:defRPr sz="1100">
                           <a:solidFill>
                             <a:srgbClr val="475569"/>
                           </a:solidFill>
@@ -6708,7 +6302,7 @@
                     <a:lstStyle/>
                     <a:p>
                       <a:pPr>
-                        <a:defRPr sz="900">
+                        <a:defRPr sz="1100">
                           <a:solidFill>
                             <a:srgbClr val="475569"/>
                           </a:solidFill>
@@ -6732,7 +6326,7 @@
                     <a:lstStyle/>
                     <a:p>
                       <a:pPr>
-                        <a:defRPr sz="900" b="1">
+                        <a:defRPr sz="1100" b="1">
                           <a:solidFill>
                             <a:srgbClr val="2563EB"/>
                           </a:solidFill>
@@ -6751,14 +6345,14 @@
                   </a:tcPr>
                 </a:tc>
               </a:tr>
-              <a:tr h="491490">
+              <a:tr h="502920">
                 <a:tc>
                   <a:txBody>
                     <a:bodyPr/>
                     <a:lstStyle/>
                     <a:p>
                       <a:pPr>
-                        <a:defRPr sz="900">
+                        <a:defRPr sz="1100">
                           <a:solidFill>
                             <a:srgbClr val="475569"/>
                           </a:solidFill>
@@ -6782,7 +6376,7 @@
                     <a:lstStyle/>
                     <a:p>
                       <a:pPr>
-                        <a:defRPr sz="900">
+                        <a:defRPr sz="1100">
                           <a:solidFill>
                             <a:srgbClr val="475569"/>
                           </a:solidFill>
@@ -6806,7 +6400,7 @@
                     <a:lstStyle/>
                     <a:p>
                       <a:pPr>
-                        <a:defRPr sz="900">
+                        <a:defRPr sz="1100">
                           <a:solidFill>
                             <a:srgbClr val="475569"/>
                           </a:solidFill>
@@ -6830,7 +6424,7 @@
                     <a:lstStyle/>
                     <a:p>
                       <a:pPr>
-                        <a:defRPr sz="900" b="1">
+                        <a:defRPr sz="1100" b="1">
                           <a:solidFill>
                             <a:srgbClr val="2563EB"/>
                           </a:solidFill>
@@ -6849,14 +6443,14 @@
                   </a:tcPr>
                 </a:tc>
               </a:tr>
-              <a:tr h="491490">
+              <a:tr h="502920">
                 <a:tc>
                   <a:txBody>
                     <a:bodyPr/>
                     <a:lstStyle/>
                     <a:p>
                       <a:pPr>
-                        <a:defRPr sz="900">
+                        <a:defRPr sz="1100">
                           <a:solidFill>
                             <a:srgbClr val="475569"/>
                           </a:solidFill>
@@ -6880,7 +6474,7 @@
                     <a:lstStyle/>
                     <a:p>
                       <a:pPr>
-                        <a:defRPr sz="900">
+                        <a:defRPr sz="1100">
                           <a:solidFill>
                             <a:srgbClr val="475569"/>
                           </a:solidFill>
@@ -6904,7 +6498,7 @@
                     <a:lstStyle/>
                     <a:p>
                       <a:pPr>
-                        <a:defRPr sz="900">
+                        <a:defRPr sz="1100">
                           <a:solidFill>
                             <a:srgbClr val="475569"/>
                           </a:solidFill>
@@ -6928,7 +6522,7 @@
                     <a:lstStyle/>
                     <a:p>
                       <a:pPr>
-                        <a:defRPr sz="900" b="1">
+                        <a:defRPr sz="1100" b="1">
                           <a:solidFill>
                             <a:srgbClr val="2563EB"/>
                           </a:solidFill>
@@ -6947,14 +6541,14 @@
                   </a:tcPr>
                 </a:tc>
               </a:tr>
-              <a:tr h="491490">
+              <a:tr h="502920">
                 <a:tc>
                   <a:txBody>
                     <a:bodyPr/>
                     <a:lstStyle/>
                     <a:p>
                       <a:pPr>
-                        <a:defRPr sz="900">
+                        <a:defRPr sz="1100">
                           <a:solidFill>
                             <a:srgbClr val="475569"/>
                           </a:solidFill>
@@ -6978,7 +6572,7 @@
                     <a:lstStyle/>
                     <a:p>
                       <a:pPr>
-                        <a:defRPr sz="900">
+                        <a:defRPr sz="1100">
                           <a:solidFill>
                             <a:srgbClr val="475569"/>
                           </a:solidFill>
@@ -7002,7 +6596,7 @@
                     <a:lstStyle/>
                     <a:p>
                       <a:pPr>
-                        <a:defRPr sz="900">
+                        <a:defRPr sz="1100">
                           <a:solidFill>
                             <a:srgbClr val="475569"/>
                           </a:solidFill>
@@ -7026,7 +6620,7 @@
                     <a:lstStyle/>
                     <a:p>
                       <a:pPr>
-                        <a:defRPr sz="900" b="1">
+                        <a:defRPr sz="1100" b="1">
                           <a:solidFill>
                             <a:srgbClr val="2563EB"/>
                           </a:solidFill>
@@ -7045,14 +6639,14 @@
                   </a:tcPr>
                 </a:tc>
               </a:tr>
-              <a:tr h="491490">
+              <a:tr h="502920">
                 <a:tc>
                   <a:txBody>
                     <a:bodyPr/>
                     <a:lstStyle/>
                     <a:p>
                       <a:pPr>
-                        <a:defRPr sz="900">
+                        <a:defRPr sz="1100">
                           <a:solidFill>
                             <a:srgbClr val="475569"/>
                           </a:solidFill>
@@ -7076,7 +6670,7 @@
                     <a:lstStyle/>
                     <a:p>
                       <a:pPr>
-                        <a:defRPr sz="900">
+                        <a:defRPr sz="1100">
                           <a:solidFill>
                             <a:srgbClr val="475569"/>
                           </a:solidFill>
@@ -7100,7 +6694,7 @@
                     <a:lstStyle/>
                     <a:p>
                       <a:pPr>
-                        <a:defRPr sz="900">
+                        <a:defRPr sz="1100">
                           <a:solidFill>
                             <a:srgbClr val="475569"/>
                           </a:solidFill>
@@ -7124,7 +6718,7 @@
                     <a:lstStyle/>
                     <a:p>
                       <a:pPr>
-                        <a:defRPr sz="900" b="1">
+                        <a:defRPr sz="1100" b="1">
                           <a:solidFill>
                             <a:srgbClr val="2563EB"/>
                           </a:solidFill>
@@ -7143,14 +6737,14 @@
                   </a:tcPr>
                 </a:tc>
               </a:tr>
-              <a:tr h="491490">
+              <a:tr h="502920">
                 <a:tc>
                   <a:txBody>
                     <a:bodyPr/>
                     <a:lstStyle/>
                     <a:p>
                       <a:pPr>
-                        <a:defRPr sz="900">
+                        <a:defRPr sz="1100">
                           <a:solidFill>
                             <a:srgbClr val="475569"/>
                           </a:solidFill>
@@ -7174,7 +6768,7 @@
                     <a:lstStyle/>
                     <a:p>
                       <a:pPr>
-                        <a:defRPr sz="900">
+                        <a:defRPr sz="1100">
                           <a:solidFill>
                             <a:srgbClr val="475569"/>
                           </a:solidFill>
@@ -7198,7 +6792,7 @@
                     <a:lstStyle/>
                     <a:p>
                       <a:pPr>
-                        <a:defRPr sz="900">
+                        <a:defRPr sz="1100">
                           <a:solidFill>
                             <a:srgbClr val="475569"/>
                           </a:solidFill>
@@ -7222,7 +6816,7 @@
                     <a:lstStyle/>
                     <a:p>
                       <a:pPr>
-                        <a:defRPr sz="900" b="1">
+                        <a:defRPr sz="1100" b="1">
                           <a:solidFill>
                             <a:srgbClr val="2563EB"/>
                           </a:solidFill>
@@ -7241,14 +6835,14 @@
                   </a:tcPr>
                 </a:tc>
               </a:tr>
-              <a:tr h="491490">
+              <a:tr h="502920">
                 <a:tc>
                   <a:txBody>
                     <a:bodyPr/>
                     <a:lstStyle/>
                     <a:p>
                       <a:pPr>
-                        <a:defRPr sz="900">
+                        <a:defRPr sz="1100">
                           <a:solidFill>
                             <a:srgbClr val="475569"/>
                           </a:solidFill>
@@ -7272,7 +6866,7 @@
                     <a:lstStyle/>
                     <a:p>
                       <a:pPr>
-                        <a:defRPr sz="900">
+                        <a:defRPr sz="1100">
                           <a:solidFill>
                             <a:srgbClr val="475569"/>
                           </a:solidFill>
@@ -7296,7 +6890,7 @@
                     <a:lstStyle/>
                     <a:p>
                       <a:pPr>
-                        <a:defRPr sz="900">
+                        <a:defRPr sz="1100">
                           <a:solidFill>
                             <a:srgbClr val="475569"/>
                           </a:solidFill>
@@ -7320,7 +6914,7 @@
                     <a:lstStyle/>
                     <a:p>
                       <a:pPr>
-                        <a:defRPr sz="900" b="1">
+                        <a:defRPr sz="1100" b="1">
                           <a:solidFill>
                             <a:srgbClr val="2563EB"/>
                           </a:solidFill>
@@ -7351,8 +6945,8 @@
         </p:nvSpPr>
         <p:spPr>
           <a:xfrm>
-            <a:off x="731520" y="5623560"/>
-            <a:ext cx="10728655" cy="594360"/>
+            <a:off x="731520" y="5715000"/>
+            <a:ext cx="10728655" cy="548640"/>
           </a:xfrm>
           <a:prstGeom prst="roundRect">
             <a:avLst/>
@@ -7385,7 +6979,7 @@
           <a:lstStyle/>
           <a:p>
             <a:pPr algn="ctr">
-              <a:defRPr sz="1050" b="1">
+              <a:defRPr sz="1200" b="1">
                 <a:solidFill>
                   <a:srgbClr val="065F46"/>
                 </a:solidFill>
@@ -7467,8 +7061,8 @@
         </p:nvSpPr>
         <p:spPr>
           <a:xfrm>
-            <a:off x="731520" y="365760"/>
-            <a:ext cx="4114800" cy="292608"/>
+            <a:off x="731520" y="347472"/>
+            <a:ext cx="4389120" cy="310896"/>
           </a:xfrm>
           <a:prstGeom prst="roundRect">
             <a:avLst/>
@@ -7501,7 +7095,7 @@
           <a:lstStyle/>
           <a:p>
             <a:pPr algn="ctr">
-              <a:defRPr sz="850" b="1">
+              <a:defRPr sz="950" b="1">
                 <a:solidFill>
                   <a:srgbClr val="2563EB"/>
                 </a:solidFill>
@@ -7523,7 +7117,7 @@
         <p:spPr>
           <a:xfrm>
             <a:off x="731520" y="658368"/>
-            <a:ext cx="10698480" cy="594360"/>
+            <a:ext cx="10698480" cy="621792"/>
           </a:xfrm>
           <a:prstGeom prst="rect">
             <a:avLst/>
@@ -7537,7 +7131,7 @@
           <a:lstStyle/>
           <a:p>
             <a:pPr>
-              <a:defRPr sz="2100" b="1">
+              <a:defRPr sz="2200" b="1">
                 <a:solidFill>
                   <a:srgbClr val="0F172A"/>
                 </a:solidFill>
@@ -7558,7 +7152,7 @@
         </p:nvSpPr>
         <p:spPr>
           <a:xfrm>
-            <a:off x="731520" y="1298448"/>
+            <a:off x="731520" y="1316736"/>
             <a:ext cx="10728655" cy="18288"/>
           </a:xfrm>
           <a:prstGeom prst="rect">
@@ -7616,7 +7210,7 @@
           <a:lstStyle/>
           <a:p>
             <a:pPr>
-              <a:defRPr sz="800">
+              <a:defRPr sz="900">
                 <a:solidFill>
                   <a:srgbClr val="64748B"/>
                 </a:solidFill>
@@ -7637,8 +7231,8 @@
         </p:nvSpPr>
         <p:spPr>
           <a:xfrm>
-            <a:off x="731520" y="1554480"/>
-            <a:ext cx="5257800" cy="4480560"/>
+            <a:off x="731520" y="1536192"/>
+            <a:ext cx="5257800" cy="4572000"/>
           </a:xfrm>
           <a:prstGeom prst="roundRect">
             <a:avLst/>
@@ -7672,9 +7266,9 @@
           <a:p>
             <a:pPr algn="ctr">
               <a:spcAft>
-                <a:spcPts val="400"/>
-              </a:spcAft>
-              <a:defRPr sz="1200" b="1">
+                <a:spcPts val="600"/>
+              </a:spcAft>
+              <a:defRPr sz="1300" b="1">
                 <a:solidFill>
                   <a:srgbClr val="B45309"/>
                 </a:solidFill>
@@ -7682,15 +7276,15 @@
               </a:defRPr>
             </a:pPr>
             <a:r>
-              <a:t>Current Operational Limitations</a:t>
-            </a:r>
-          </a:p>
-          <a:p>
-            <a:pPr>
-              <a:spcAft>
-                <a:spcPts val="600"/>
-              </a:spcAft>
-              <a:defRPr sz="1000">
+              <a:t>Current Operational Boundaries</a:t>
+            </a:r>
+          </a:p>
+          <a:p>
+            <a:pPr>
+              <a:spcAft>
+                <a:spcPts val="800"/>
+              </a:spcAft>
+              <a:defRPr sz="1200">
                 <a:solidFill>
                   <a:srgbClr val="475569"/>
                 </a:solidFill>
@@ -7698,15 +7292,15 @@
               </a:defRPr>
             </a:pPr>
             <a:r>
-              <a:t>• Driver Smartphone Dependency: Fleet tracking is contingent on driver device battery life and keeping location permissions active during the shift.</a:t>
-            </a:r>
-          </a:p>
-          <a:p>
-            <a:pPr>
-              <a:spcAft>
-                <a:spcPts val="600"/>
-              </a:spcAft>
-              <a:defRPr sz="1000">
+              <a:t>â¢ Driver Smartphone Dependency: Fleet tracking relies on the driver's device battery life and active location permissions during the shift.</a:t>
+            </a:r>
+          </a:p>
+          <a:p>
+            <a:pPr>
+              <a:spcAft>
+                <a:spcPts val="800"/>
+              </a:spcAft>
+              <a:defRPr sz="1200">
                 <a:solidFill>
                   <a:srgbClr val="475569"/>
                 </a:solidFill>
@@ -7714,15 +7308,15 @@
               </a:defRPr>
             </a:pPr>
             <a:r>
-              <a:t>• Cellular Network Dead Zones: Temporary 4G signal loss in deep valleys or peripheral coastal alleys pauses real-time telemetry streaming (buffered locally).</a:t>
-            </a:r>
-          </a:p>
-          <a:p>
-            <a:pPr>
-              <a:spcAft>
-                <a:spcPts val="600"/>
-              </a:spcAft>
-              <a:defRPr sz="1000">
+              <a:t>â¢ Cellular Network Dead Zones: Temporary 4G signal loss in deep valleys or peripheral alleys pauses real-time telemetry streaming (buffered locally).</a:t>
+            </a:r>
+          </a:p>
+          <a:p>
+            <a:pPr>
+              <a:spcAft>
+                <a:spcPts val="800"/>
+              </a:spcAft>
+              <a:defRPr sz="1200">
                 <a:solidFill>
                   <a:srgbClr val="475569"/>
                 </a:solidFill>
@@ -7730,15 +7324,15 @@
               </a:defRPr>
             </a:pPr>
             <a:r>
-              <a:t>• Absence of Direct Weight Scales: Because bins lack physical load cells, collected garbage weights rely on driver visual estimation or volumetric heuristics.</a:t>
-            </a:r>
-          </a:p>
-          <a:p>
-            <a:pPr>
-              <a:spcAft>
-                <a:spcPts val="600"/>
-              </a:spcAft>
-              <a:defRPr sz="1000">
+              <a:t>â¢ Absence of Direct Weight Scales: Because bins lack physical load cells, collected garbage weights rely on driver visual estimation or volumetric heuristics.</a:t>
+            </a:r>
+          </a:p>
+          <a:p>
+            <a:pPr>
+              <a:spcAft>
+                <a:spcPts val="800"/>
+              </a:spcAft>
+              <a:defRPr sz="1200">
                 <a:solidFill>
                   <a:srgbClr val="475569"/>
                 </a:solidFill>
@@ -7746,7 +7340,7 @@
               </a:defRPr>
             </a:pPr>
             <a:r>
-              <a:t>• Compliance Reliance: Requires driver cooperation to tap 'Mark Collected' and upload photo proof at every scheduled checkpoint.</a:t>
+              <a:t>â¢ Operator Compliance Reliance: Requires driver cooperation to tap 'Mark Collected' and upload photo proof at every scheduled checkpoint.</a:t>
             </a:r>
           </a:p>
         </p:txBody>
@@ -7759,8 +7353,8 @@
         </p:nvSpPr>
         <p:spPr>
           <a:xfrm>
-            <a:off x="6217920" y="1554480"/>
-            <a:ext cx="5257800" cy="4480560"/>
+            <a:off x="6217920" y="1536192"/>
+            <a:ext cx="5257800" cy="4572000"/>
           </a:xfrm>
           <a:prstGeom prst="roundRect">
             <a:avLst/>
@@ -7794,9 +7388,9 @@
           <a:p>
             <a:pPr algn="ctr">
               <a:spcAft>
-                <a:spcPts val="400"/>
-              </a:spcAft>
-              <a:defRPr sz="1200" b="1">
+                <a:spcPts val="600"/>
+              </a:spcAft>
+              <a:defRPr sz="1300" b="1">
                 <a:solidFill>
                   <a:srgbClr val="1E3A8A"/>
                 </a:solidFill>
@@ -7804,15 +7398,15 @@
               </a:defRPr>
             </a:pPr>
             <a:r>
-              <a:t>Future Engineering Enhancements</a:t>
-            </a:r>
-          </a:p>
-          <a:p>
-            <a:pPr>
-              <a:spcAft>
-                <a:spcPts val="600"/>
-              </a:spcAft>
-              <a:defRPr sz="1000">
+              <a:t>Future Engineering Roadmap</a:t>
+            </a:r>
+          </a:p>
+          <a:p>
+            <a:pPr>
+              <a:spcAft>
+                <a:spcPts val="800"/>
+              </a:spcAft>
+              <a:defRPr sz="1200">
                 <a:solidFill>
                   <a:srgbClr val="475569"/>
                 </a:solidFill>
@@ -7820,15 +7414,15 @@
               </a:defRPr>
             </a:pPr>
             <a:r>
-              <a:t>• Offline-First PWA Synchronization: Implement SQLite / IndexedDB client caching so full shift telemetry and photos sync seamlessly when connectivity resumes.</a:t>
-            </a:r>
-          </a:p>
-          <a:p>
-            <a:pPr>
-              <a:spcAft>
-                <a:spcPts val="600"/>
-              </a:spcAft>
-              <a:defRPr sz="1000">
+              <a:t>â¢ Offline-First PWA Synchronization: Implement SQLite / IndexedDB client caching so full shift telemetry and photos sync seamlessly when connectivity resumes.</a:t>
+            </a:r>
+          </a:p>
+          <a:p>
+            <a:pPr>
+              <a:spcAft>
+                <a:spcPts val="800"/>
+              </a:spcAft>
+              <a:defRPr sz="1200">
                 <a:solidFill>
                   <a:srgbClr val="475569"/>
                 </a:solidFill>
@@ -7836,15 +7430,15 @@
               </a:defRPr>
             </a:pPr>
             <a:r>
-              <a:t>• Computer Vision (YOLOv8) AI: Automatically analyze driver collection photos using deep learning to verify bin fullness percentage and classify waste segregation.</a:t>
-            </a:r>
-          </a:p>
-          <a:p>
-            <a:pPr>
-              <a:spcAft>
-                <a:spcPts val="600"/>
-              </a:spcAft>
-              <a:defRPr sz="1000">
+              <a:t>â¢ Computer Vision (YOLOv8) AI: Automatically analyze driver collection photos using deep learning to verify bin fullness percentage and classify waste segregation.</a:t>
+            </a:r>
+          </a:p>
+          <a:p>
+            <a:pPr>
+              <a:spcAft>
+                <a:spcPts val="800"/>
+              </a:spcAft>
+              <a:defRPr sz="1200">
                 <a:solidFill>
                   <a:srgbClr val="475569"/>
                 </a:solidFill>
@@ -7852,15 +7446,15 @@
               </a:defRPr>
             </a:pPr>
             <a:r>
-              <a:t>• Dynamic Route Optimization (VRP): Integrate Vehicle Routing Problem (VRP) algorithms to dynamically reorder stops based on live traffic and citizen hotspot reports.</a:t>
-            </a:r>
-          </a:p>
-          <a:p>
-            <a:pPr>
-              <a:spcAft>
-                <a:spcPts val="600"/>
-              </a:spcAft>
-              <a:defRPr sz="1000">
+              <a:t>â¢ Dynamic Route Optimization (VRP): Integrate Vehicle Routing Problem (VRP) algorithms to dynamically reorder stops based on live traffic and citizen hotspot reports.</a:t>
+            </a:r>
+          </a:p>
+          <a:p>
+            <a:pPr>
+              <a:spcAft>
+                <a:spcPts val="800"/>
+              </a:spcAft>
+              <a:defRPr sz="1200">
                 <a:solidFill>
                   <a:srgbClr val="475569"/>
                 </a:solidFill>
@@ -7868,7 +7462,7 @@
               </a:defRPr>
             </a:pPr>
             <a:r>
-              <a:t>• Automated Municipal WhatsApp Bot: Allow residents to report garbage overflow via WhatsApp photo sharing with automated geolocation extraction.</a:t>
+              <a:t>â¢ Automated Municipal WhatsApp Bot: Allow residents to report garbage overflow via WhatsApp photo sharing with automated geolocation extraction.</a:t>
             </a:r>
           </a:p>
         </p:txBody>
@@ -8013,7 +7607,7 @@
           </a:p>
           <a:p>
             <a:pPr>
-              <a:defRPr sz="1200">
+              <a:defRPr sz="1300">
                 <a:solidFill>
                   <a:srgbClr val="94A3B8"/>
                 </a:solidFill>
@@ -8071,7 +7665,7 @@
               <a:spcAft>
                 <a:spcPts val="600"/>
               </a:spcAft>
-              <a:defRPr sz="1200" b="1">
+              <a:defRPr sz="1300" b="1">
                 <a:solidFill>
                   <a:srgbClr val="3B82F6"/>
                 </a:solidFill>
@@ -8085,9 +7679,9 @@
           <a:p>
             <a:pPr>
               <a:spcAft>
-                <a:spcPts val="200"/>
-              </a:spcAft>
-              <a:defRPr sz="1000">
+                <a:spcPts val="300"/>
+              </a:spcAft>
+              <a:defRPr sz="1150">
                 <a:solidFill>
                   <a:srgbClr val="E2E8F0"/>
                 </a:solidFill>
@@ -8095,15 +7689,15 @@
               </a:defRPr>
             </a:pPr>
             <a:r>
-              <a:t>• Node.js &amp; Express REST Backend</a:t>
-            </a:r>
-          </a:p>
-          <a:p>
-            <a:pPr>
-              <a:spcAft>
-                <a:spcPts val="200"/>
-              </a:spcAft>
-              <a:defRPr sz="1000">
+              <a:t>â¢ Node.js &amp; Express REST Backend</a:t>
+            </a:r>
+          </a:p>
+          <a:p>
+            <a:pPr>
+              <a:spcAft>
+                <a:spcPts val="300"/>
+              </a:spcAft>
+              <a:defRPr sz="1150">
                 <a:solidFill>
                   <a:srgbClr val="E2E8F0"/>
                 </a:solidFill>
@@ -8111,15 +7705,15 @@
               </a:defRPr>
             </a:pPr>
             <a:r>
-              <a:t>• Leaflet.js &amp; OpenStreetMap Canvas</a:t>
-            </a:r>
-          </a:p>
-          <a:p>
-            <a:pPr>
-              <a:spcAft>
-                <a:spcPts val="200"/>
-              </a:spcAft>
-              <a:defRPr sz="1000">
+              <a:t>â¢ Leaflet.js &amp; OpenStreetMap Canvas</a:t>
+            </a:r>
+          </a:p>
+          <a:p>
+            <a:pPr>
+              <a:spcAft>
+                <a:spcPts val="300"/>
+              </a:spcAft>
+              <a:defRPr sz="1150">
                 <a:solidFill>
                   <a:srgbClr val="E2E8F0"/>
                 </a:solidFill>
@@ -8127,15 +7721,15 @@
               </a:defRPr>
             </a:pPr>
             <a:r>
-              <a:t>• Live Telemetry &amp; Audit Trail</a:t>
-            </a:r>
-          </a:p>
-          <a:p>
-            <a:pPr>
-              <a:spcAft>
-                <a:spcPts val="200"/>
-              </a:spcAft>
-              <a:defRPr sz="1000">
+              <a:t>â¢ Live Telemetry &amp; Audit Trail</a:t>
+            </a:r>
+          </a:p>
+          <a:p>
+            <a:pPr>
+              <a:spcAft>
+                <a:spcPts val="300"/>
+              </a:spcAft>
+              <a:defRPr sz="1150">
                 <a:solidFill>
                   <a:srgbClr val="E2E8F0"/>
                 </a:solidFill>
@@ -8143,7 +7737,7 @@
               </a:defRPr>
             </a:pPr>
             <a:r>
-              <a:t>• Running on: http://localhost:3000</a:t>
+              <a:t>â¢ Running on: http://localhost:3000</a:t>
             </a:r>
           </a:p>
         </p:txBody>
@@ -8193,7 +7787,7 @@
               <a:spcAft>
                 <a:spcPts val="600"/>
               </a:spcAft>
-              <a:defRPr sz="1200" b="1">
+              <a:defRPr sz="1300" b="1">
                 <a:solidFill>
                   <a:srgbClr val="10B981"/>
                 </a:solidFill>
@@ -8207,9 +7801,9 @@
           <a:p>
             <a:pPr>
               <a:spcAft>
-                <a:spcPts val="200"/>
-              </a:spcAft>
-              <a:defRPr sz="1000">
+                <a:spcPts val="300"/>
+              </a:spcAft>
+              <a:defRPr sz="1150">
                 <a:solidFill>
                   <a:srgbClr val="E2E8F0"/>
                 </a:solidFill>
@@ -8217,15 +7811,15 @@
               </a:defRPr>
             </a:pPr>
             <a:r>
-              <a:t>• Streamlit + Folium Interactive App</a:t>
-            </a:r>
-          </a:p>
-          <a:p>
-            <a:pPr>
-              <a:spcAft>
-                <a:spcPts val="200"/>
-              </a:spcAft>
-              <a:defRPr sz="1000">
+              <a:t>â¢ Streamlit + Folium Interactive App</a:t>
+            </a:r>
+          </a:p>
+          <a:p>
+            <a:pPr>
+              <a:spcAft>
+                <a:spcPts val="300"/>
+              </a:spcAft>
+              <a:defRPr sz="1150">
                 <a:solidFill>
                   <a:srgbClr val="E2E8F0"/>
                 </a:solidFill>
@@ -8233,15 +7827,15 @@
               </a:defRPr>
             </a:pPr>
             <a:r>
-              <a:t>• Mobile-friendly Driver Manifest</a:t>
-            </a:r>
-          </a:p>
-          <a:p>
-            <a:pPr>
-              <a:spcAft>
-                <a:spcPts val="200"/>
-              </a:spcAft>
-              <a:defRPr sz="1000">
+              <a:t>â¢ Mobile-friendly Driver Manifest</a:t>
+            </a:r>
+          </a:p>
+          <a:p>
+            <a:pPr>
+              <a:spcAft>
+                <a:spcPts val="300"/>
+              </a:spcAft>
+              <a:defRPr sz="1150">
                 <a:solidFill>
                   <a:srgbClr val="E2E8F0"/>
                 </a:solidFill>
@@ -8249,15 +7843,15 @@
               </a:defRPr>
             </a:pPr>
             <a:r>
-              <a:t>• Public Citizen Grievance Portal</a:t>
-            </a:r>
-          </a:p>
-          <a:p>
-            <a:pPr>
-              <a:spcAft>
-                <a:spcPts val="200"/>
-              </a:spcAft>
-              <a:defRPr sz="1000">
+              <a:t>â¢ Public Citizen Grievance Portal</a:t>
+            </a:r>
+          </a:p>
+          <a:p>
+            <a:pPr>
+              <a:spcAft>
+                <a:spcPts val="300"/>
+              </a:spcAft>
+              <a:defRPr sz="1150">
                 <a:solidFill>
                   <a:srgbClr val="E2E8F0"/>
                 </a:solidFill>
@@ -8265,7 +7859,7 @@
               </a:defRPr>
             </a:pPr>
             <a:r>
-              <a:t>• GitHub: saikiranbora25-byte</a:t>
+              <a:t>â¢ GitHub: saikiranbora25-byte</a:t>
             </a:r>
           </a:p>
         </p:txBody>
@@ -8315,7 +7909,7 @@
               <a:spcAft>
                 <a:spcPts val="600"/>
               </a:spcAft>
-              <a:defRPr sz="1200" b="1">
+              <a:defRPr sz="1300" b="1">
                 <a:solidFill>
                   <a:srgbClr val="F59E0B"/>
                 </a:solidFill>
@@ -8329,9 +7923,9 @@
           <a:p>
             <a:pPr>
               <a:spcAft>
-                <a:spcPts val="200"/>
-              </a:spcAft>
-              <a:defRPr sz="1000">
+                <a:spcPts val="300"/>
+              </a:spcAft>
+              <a:defRPr sz="1150">
                 <a:solidFill>
                   <a:srgbClr val="E2E8F0"/>
                 </a:solidFill>
@@ -8339,15 +7933,15 @@
               </a:defRPr>
             </a:pPr>
             <a:r>
-              <a:t>• 8,123-word Comprehensive Book</a:t>
-            </a:r>
-          </a:p>
-          <a:p>
-            <a:pPr>
-              <a:spcAft>
-                <a:spcPts val="200"/>
-              </a:spcAft>
-              <a:defRPr sz="1000">
+              <a:t>â¢ 8,123-word Comprehensive Book</a:t>
+            </a:r>
+          </a:p>
+          <a:p>
+            <a:pPr>
+              <a:spcAft>
+                <a:spcPts val="300"/>
+              </a:spcAft>
+              <a:defRPr sz="1150">
                 <a:solidFill>
                   <a:srgbClr val="E2E8F0"/>
                 </a:solidFill>
@@ -8355,15 +7949,15 @@
               </a:defRPr>
             </a:pPr>
             <a:r>
-              <a:t>• Strict ANITS Template Compliance</a:t>
-            </a:r>
-          </a:p>
-          <a:p>
-            <a:pPr>
-              <a:spcAft>
-                <a:spcPts val="200"/>
-              </a:spcAft>
-              <a:defRPr sz="1000">
+              <a:t>â¢ Strict ANITS Template Compliance</a:t>
+            </a:r>
+          </a:p>
+          <a:p>
+            <a:pPr>
+              <a:spcAft>
+                <a:spcPts val="300"/>
+              </a:spcAft>
+              <a:defRPr sz="1150">
                 <a:solidFill>
                   <a:srgbClr val="E2E8F0"/>
                 </a:solidFill>
@@ -8371,15 +7965,15 @@
               </a:defRPr>
             </a:pPr>
             <a:r>
-              <a:t>• 11 Tables &amp; 20 Embedded Figures</a:t>
-            </a:r>
-          </a:p>
-          <a:p>
-            <a:pPr>
-              <a:spcAft>
-                <a:spcPts val="200"/>
-              </a:spcAft>
-              <a:defRPr sz="1000">
+              <a:t>â¢ 11 Tables &amp; 20 Embedded Figures</a:t>
+            </a:r>
+          </a:p>
+          <a:p>
+            <a:pPr>
+              <a:spcAft>
+                <a:spcPts val="300"/>
+              </a:spcAft>
+              <a:defRPr sz="1150">
                 <a:solidFill>
                   <a:srgbClr val="E2E8F0"/>
                 </a:solidFill>
@@ -8387,7 +7981,7 @@
               </a:defRPr>
             </a:pPr>
             <a:r>
-              <a:t>• Formatted for Spiral Binding</a:t>
+              <a:t>â¢ Formatted for Spiral Binding</a:t>
             </a:r>
           </a:p>
         </p:txBody>
@@ -8437,7 +8031,7 @@
               <a:spcAft>
                 <a:spcPts val="400"/>
               </a:spcAft>
-              <a:defRPr sz="2200" b="1">
+              <a:defRPr sz="2400" b="1">
                 <a:solidFill>
                   <a:srgbClr val="38BDF8"/>
                 </a:solidFill>
@@ -8453,7 +8047,7 @@
               <a:spcAft>
                 <a:spcPts val="400"/>
               </a:spcAft>
-              <a:defRPr sz="1300" b="1">
+              <a:defRPr sz="1350" b="1">
                 <a:solidFill>
                   <a:srgbClr val="FFFFFF"/>
                 </a:solidFill>
@@ -8466,7 +8060,7 @@
           </a:p>
           <a:p>
             <a:pPr algn="ctr">
-              <a:defRPr sz="1000">
+              <a:defRPr sz="1100">
                 <a:solidFill>
                   <a:srgbClr val="94A3B8"/>
                 </a:solidFill>
@@ -8548,8 +8142,8 @@
         </p:nvSpPr>
         <p:spPr>
           <a:xfrm>
-            <a:off x="731520" y="365760"/>
-            <a:ext cx="4114800" cy="292608"/>
+            <a:off x="731520" y="347472"/>
+            <a:ext cx="4389120" cy="310896"/>
           </a:xfrm>
           <a:prstGeom prst="roundRect">
             <a:avLst/>
@@ -8582,7 +8176,7 @@
           <a:lstStyle/>
           <a:p>
             <a:pPr algn="ctr">
-              <a:defRPr sz="850" b="1">
+              <a:defRPr sz="950" b="1">
                 <a:solidFill>
                   <a:srgbClr val="2563EB"/>
                 </a:solidFill>
@@ -8604,7 +8198,7 @@
         <p:spPr>
           <a:xfrm>
             <a:off x="731520" y="658368"/>
-            <a:ext cx="10698480" cy="594360"/>
+            <a:ext cx="10698480" cy="621792"/>
           </a:xfrm>
           <a:prstGeom prst="rect">
             <a:avLst/>
@@ -8618,7 +8212,7 @@
           <a:lstStyle/>
           <a:p>
             <a:pPr>
-              <a:defRPr sz="2100" b="1">
+              <a:defRPr sz="2200" b="1">
                 <a:solidFill>
                   <a:srgbClr val="0F172A"/>
                 </a:solidFill>
@@ -8639,7 +8233,7 @@
         </p:nvSpPr>
         <p:spPr>
           <a:xfrm>
-            <a:off x="731520" y="1298448"/>
+            <a:off x="731520" y="1316736"/>
             <a:ext cx="10728655" cy="18288"/>
           </a:xfrm>
           <a:prstGeom prst="rect">
@@ -8697,7 +8291,7 @@
           <a:lstStyle/>
           <a:p>
             <a:pPr>
-              <a:defRPr sz="800">
+              <a:defRPr sz="900">
                 <a:solidFill>
                   <a:srgbClr val="64748B"/>
                 </a:solidFill>
@@ -8718,8 +8312,8 @@
         </p:nvSpPr>
         <p:spPr>
           <a:xfrm>
-            <a:off x="731520" y="1554480"/>
-            <a:ext cx="3474720" cy="4480560"/>
+            <a:off x="731520" y="1536192"/>
+            <a:ext cx="3474720" cy="4572000"/>
           </a:xfrm>
           <a:prstGeom prst="roundRect">
             <a:avLst/>
@@ -8753,9 +8347,9 @@
           <a:p>
             <a:pPr algn="ctr">
               <a:spcAft>
-                <a:spcPts val="400"/>
-              </a:spcAft>
-              <a:defRPr sz="1200" b="1">
+                <a:spcPts val="600"/>
+              </a:spcAft>
+              <a:defRPr sz="1300" b="1">
                 <a:solidFill>
                   <a:srgbClr val="2563EB"/>
                 </a:solidFill>
@@ -8769,9 +8363,9 @@
           <a:p>
             <a:pPr>
               <a:spcAft>
-                <a:spcPts val="400"/>
-              </a:spcAft>
-              <a:defRPr sz="1050">
+                <a:spcPts val="600"/>
+              </a:spcAft>
+              <a:defRPr sz="1200">
                 <a:solidFill>
                   <a:srgbClr val="475569"/>
                 </a:solidFill>
@@ -8779,15 +8373,15 @@
               </a:defRPr>
             </a:pPr>
             <a:r>
-              <a:t>• Rapid urbanization across tier-2 cities like Visakhapatnam generates 500+ metric tons of waste daily.</a:t>
-            </a:r>
-          </a:p>
-          <a:p>
-            <a:pPr>
-              <a:spcAft>
-                <a:spcPts val="400"/>
-              </a:spcAft>
-              <a:defRPr sz="1050">
+              <a:t>â¢ Rapid urban growth in cities generates over 500 metric tons of garbage every day.</a:t>
+            </a:r>
+          </a:p>
+          <a:p>
+            <a:pPr>
+              <a:spcAft>
+                <a:spcPts val="600"/>
+              </a:spcAft>
+              <a:defRPr sz="1200">
                 <a:solidFill>
                   <a:srgbClr val="475569"/>
                 </a:solidFill>
@@ -8795,15 +8389,15 @@
               </a:defRPr>
             </a:pPr>
             <a:r>
-              <a:t>• Covers dense residential colonies, market yards, commercial districts, and narrow coastal alleys.</a:t>
-            </a:r>
-          </a:p>
-          <a:p>
-            <a:pPr>
-              <a:spcAft>
-                <a:spcPts val="400"/>
-              </a:spcAft>
-              <a:defRPr sz="1050">
+              <a:t>â¢ Spans dense residential colonies, busy commercial zones, and narrow alleys.</a:t>
+            </a:r>
+          </a:p>
+          <a:p>
+            <a:pPr>
+              <a:spcAft>
+                <a:spcPts val="600"/>
+              </a:spcAft>
+              <a:defRPr sz="1200">
                 <a:solidFill>
                   <a:srgbClr val="475569"/>
                 </a:solidFill>
@@ -8811,7 +8405,7 @@
               </a:defRPr>
             </a:pPr>
             <a:r>
-              <a:t>• Requires continuous, synchronized vehicle dispatch across dozens of municipal wards daily.</a:t>
+              <a:t>â¢ Requires synchronized dispatch of municipal collection trucks every single morning.</a:t>
             </a:r>
           </a:p>
         </p:txBody>
@@ -8824,8 +8418,8 @@
         </p:nvSpPr>
         <p:spPr>
           <a:xfrm>
-            <a:off x="4343400" y="1554480"/>
-            <a:ext cx="3474720" cy="4480560"/>
+            <a:off x="4343400" y="1536192"/>
+            <a:ext cx="3474720" cy="4572000"/>
           </a:xfrm>
           <a:prstGeom prst="roundRect">
             <a:avLst/>
@@ -8859,9 +8453,9 @@
           <a:p>
             <a:pPr algn="ctr">
               <a:spcAft>
-                <a:spcPts val="400"/>
-              </a:spcAft>
-              <a:defRPr sz="1200" b="1">
+                <a:spcPts val="600"/>
+              </a:spcAft>
+              <a:defRPr sz="1300" b="1">
                 <a:solidFill>
                   <a:srgbClr val="10B981"/>
                 </a:solidFill>
@@ -8875,9 +8469,9 @@
           <a:p>
             <a:pPr>
               <a:spcAft>
-                <a:spcPts val="400"/>
-              </a:spcAft>
-              <a:defRPr sz="1050">
+                <a:spcPts val="600"/>
+              </a:spcAft>
+              <a:defRPr sz="1200">
                 <a:solidFill>
                   <a:srgbClr val="475569"/>
                 </a:solidFill>
@@ -8885,15 +8479,15 @@
               </a:defRPr>
             </a:pPr>
             <a:r>
-              <a:t>• Uncollected secondary garbage bins overflow within hours, producing foul odors and civic hazards.</a:t>
-            </a:r>
-          </a:p>
-          <a:p>
-            <a:pPr>
-              <a:spcAft>
-                <a:spcPts val="400"/>
-              </a:spcAft>
-              <a:defRPr sz="1050">
+              <a:t>â¢ Overflowing secondary garbage bins emit severe odors and create public hazards.</a:t>
+            </a:r>
+          </a:p>
+          <a:p>
+            <a:pPr>
+              <a:spcAft>
+                <a:spcPts val="600"/>
+              </a:spcAft>
+              <a:defRPr sz="1200">
                 <a:solidFill>
                   <a:srgbClr val="475569"/>
                 </a:solidFill>
@@ -8901,15 +8495,15 @@
               </a:defRPr>
             </a:pPr>
             <a:r>
-              <a:t>• Accelerates the breeding of disease vectors (dengue, cholera, malaria) and stray animal feeding.</a:t>
-            </a:r>
-          </a:p>
-          <a:p>
-            <a:pPr>
-              <a:spcAft>
-                <a:spcPts val="400"/>
-              </a:spcAft>
-              <a:defRPr sz="1050">
+              <a:t>â¢ Accelerates vector-borne disease outbreaks like dengue, malaria, and cholera.</a:t>
+            </a:r>
+          </a:p>
+          <a:p>
+            <a:pPr>
+              <a:spcAft>
+                <a:spcPts val="600"/>
+              </a:spcAft>
+              <a:defRPr sz="1200">
                 <a:solidFill>
                   <a:srgbClr val="475569"/>
                 </a:solidFill>
@@ -8917,7 +8511,7 @@
               </a:defRPr>
             </a:pPr>
             <a:r>
-              <a:t>• Corrosive leachate fluid seeps into municipal storm drains and local groundwater reserves.</a:t>
+              <a:t>â¢ Unchecked toxic leachate fluid contaminates storm drains and underground water.</a:t>
             </a:r>
           </a:p>
         </p:txBody>
@@ -8930,8 +8524,8 @@
         </p:nvSpPr>
         <p:spPr>
           <a:xfrm>
-            <a:off x="7955280" y="1554480"/>
-            <a:ext cx="3474720" cy="4480560"/>
+            <a:off x="7955280" y="1536192"/>
+            <a:ext cx="3474720" cy="4572000"/>
           </a:xfrm>
           <a:prstGeom prst="roundRect">
             <a:avLst/>
@@ -8965,9 +8559,9 @@
           <a:p>
             <a:pPr algn="ctr">
               <a:spcAft>
-                <a:spcPts val="400"/>
-              </a:spcAft>
-              <a:defRPr sz="1200" b="1">
+                <a:spcPts val="600"/>
+              </a:spcAft>
+              <a:defRPr sz="1300" b="1">
                 <a:solidFill>
                   <a:srgbClr val="8B5CF6"/>
                 </a:solidFill>
@@ -8981,9 +8575,9 @@
           <a:p>
             <a:pPr>
               <a:spcAft>
-                <a:spcPts val="400"/>
-              </a:spcAft>
-              <a:defRPr sz="1050">
+                <a:spcPts val="600"/>
+              </a:spcAft>
+              <a:defRPr sz="1200">
                 <a:solidFill>
                   <a:srgbClr val="475569"/>
                 </a:solidFill>
@@ -8991,15 +8585,15 @@
               </a:defRPr>
             </a:pPr>
             <a:r>
-              <a:t>• Municipal corporations dedicate up to 35%•40% of their total civic budget to solid waste logistics.</a:t>
-            </a:r>
-          </a:p>
-          <a:p>
-            <a:pPr>
-              <a:spcAft>
-                <a:spcPts val="400"/>
-              </a:spcAft>
-              <a:defRPr sz="1050">
+              <a:t>â¢ Municipal corporations spend 35% to 40% of their total annual budget on waste logistics.</a:t>
+            </a:r>
+          </a:p>
+          <a:p>
+            <a:pPr>
+              <a:spcAft>
+                <a:spcPts val="600"/>
+              </a:spcAft>
+              <a:defRPr sz="1200">
                 <a:solidFill>
                   <a:srgbClr val="475569"/>
                 </a:solidFill>
@@ -9007,15 +8601,15 @@
               </a:defRPr>
             </a:pPr>
             <a:r>
-              <a:t>• Fuel costs, compactor maintenance, and ground personnel constitute massive daily expenditures.</a:t>
-            </a:r>
-          </a:p>
-          <a:p>
-            <a:pPr>
-              <a:spcAft>
-                <a:spcPts val="400"/>
-              </a:spcAft>
-              <a:defRPr sz="1050">
+              <a:t>â¢ Fuel consumption and truck fleet maintenance represent heavy daily expenses.</a:t>
+            </a:r>
+          </a:p>
+          <a:p>
+            <a:pPr>
+              <a:spcAft>
+                <a:spcPts val="600"/>
+              </a:spcAft>
+              <a:defRPr sz="1200">
                 <a:solidFill>
                   <a:srgbClr val="475569"/>
                 </a:solidFill>
@@ -9023,7 +8617,7 @@
               </a:defRPr>
             </a:pPr>
             <a:r>
-              <a:t>• Lack of software automation causes systemic financial inefficiency and untracked service delivery.</a:t>
+              <a:t>â¢ Manual pen-and-paper tracking leads to huge financial waste and missed pickups.</a:t>
             </a:r>
           </a:p>
         </p:txBody>
@@ -9097,8 +8691,8 @@
         </p:nvSpPr>
         <p:spPr>
           <a:xfrm>
-            <a:off x="731520" y="365760"/>
-            <a:ext cx="4114800" cy="292608"/>
+            <a:off x="731520" y="347472"/>
+            <a:ext cx="4389120" cy="310896"/>
           </a:xfrm>
           <a:prstGeom prst="roundRect">
             <a:avLst/>
@@ -9131,7 +8725,7 @@
           <a:lstStyle/>
           <a:p>
             <a:pPr algn="ctr">
-              <a:defRPr sz="850" b="1">
+              <a:defRPr sz="950" b="1">
                 <a:solidFill>
                   <a:srgbClr val="2563EB"/>
                 </a:solidFill>
@@ -9153,7 +8747,7 @@
         <p:spPr>
           <a:xfrm>
             <a:off x="731520" y="658368"/>
-            <a:ext cx="10698480" cy="594360"/>
+            <a:ext cx="10698480" cy="621792"/>
           </a:xfrm>
           <a:prstGeom prst="rect">
             <a:avLst/>
@@ -9167,7 +8761,7 @@
           <a:lstStyle/>
           <a:p>
             <a:pPr>
-              <a:defRPr sz="2100" b="1">
+              <a:defRPr sz="2200" b="1">
                 <a:solidFill>
                   <a:srgbClr val="0F172A"/>
                 </a:solidFill>
@@ -9188,7 +8782,7 @@
         </p:nvSpPr>
         <p:spPr>
           <a:xfrm>
-            <a:off x="731520" y="1298448"/>
+            <a:off x="731520" y="1316736"/>
             <a:ext cx="10728655" cy="18288"/>
           </a:xfrm>
           <a:prstGeom prst="rect">
@@ -9246,7 +8840,7 @@
           <a:lstStyle/>
           <a:p>
             <a:pPr>
-              <a:defRPr sz="800">
+              <a:defRPr sz="900">
                 <a:solidFill>
                   <a:srgbClr val="64748B"/>
                 </a:solidFill>
@@ -9267,8 +8861,8 @@
         </p:nvSpPr>
         <p:spPr>
           <a:xfrm>
-            <a:off x="731520" y="1554480"/>
-            <a:ext cx="5257800" cy="2148840"/>
+            <a:off x="731520" y="1536192"/>
+            <a:ext cx="5257800" cy="2176272"/>
           </a:xfrm>
           <a:prstGeom prst="roundRect">
             <a:avLst/>
@@ -9302,22 +8896,25 @@
           <a:p>
             <a:pPr algn="ctr">
               <a:spcAft>
+                <a:spcPts val="600"/>
+              </a:spcAft>
+              <a:defRPr sz="1300" b="1">
+                <a:solidFill>
+                  <a:srgbClr val="F59E0B"/>
+                </a:solidFill>
+                <a:latin typeface="Segoe UI"/>
+              </a:defRPr>
+            </a:pPr>
+            <a:r>
+              <a:t>Static, Inflexible Route Sheets</a:t>
+            </a:r>
+          </a:p>
+          <a:p>
+            <a:pPr>
+              <a:spcAft>
                 <a:spcPts val="400"/>
               </a:spcAft>
-              <a:defRPr sz="1200" b="1">
-                <a:solidFill>
-                  <a:srgbClr val="F59E0B"/>
-                </a:solidFill>
-                <a:latin typeface="Segoe UI"/>
-              </a:defRPr>
-            </a:pPr>
-            <a:r>
-              <a:t>Static, Inflexible Route Sheets</a:t>
-            </a:r>
-          </a:p>
-          <a:p>
-            <a:pPr>
-              <a:defRPr sz="1100">
+              <a:defRPr sz="1200">
                 <a:solidFill>
                   <a:srgbClr val="475569"/>
                 </a:solidFill>
@@ -9325,7 +8922,7 @@
               </a:defRPr>
             </a:pPr>
             <a:r>
-              <a:t>Collection trucks follow historically inherited, paper-based schedules. Vehicles are dispatched blindly regardless of actual bin fill levels or neighborhood accumulation urgency.</a:t>
+              <a:t>Collection trucks follow rigid, paper-based schedules. Vehicles are dispatched blindly without knowing which bins are actually overflowing or already serviced.</a:t>
             </a:r>
           </a:p>
         </p:txBody>
@@ -9338,8 +8935,8 @@
         </p:nvSpPr>
         <p:spPr>
           <a:xfrm>
-            <a:off x="6172200" y="1554480"/>
-            <a:ext cx="5257800" cy="2148840"/>
+            <a:off x="6172200" y="1536192"/>
+            <a:ext cx="5257800" cy="2176272"/>
           </a:xfrm>
           <a:prstGeom prst="roundRect">
             <a:avLst/>
@@ -9373,22 +8970,25 @@
           <a:p>
             <a:pPr algn="ctr">
               <a:spcAft>
+                <a:spcPts val="600"/>
+              </a:spcAft>
+              <a:defRPr sz="1300" b="1">
+                <a:solidFill>
+                  <a:srgbClr val="EF4444"/>
+                </a:solidFill>
+                <a:latin typeface="Segoe UI"/>
+              </a:defRPr>
+            </a:pPr>
+            <a:r>
+              <a:t>Zero Route Verifiability &amp; Accountability</a:t>
+            </a:r>
+          </a:p>
+          <a:p>
+            <a:pPr>
+              <a:spcAft>
                 <a:spcPts val="400"/>
               </a:spcAft>
-              <a:defRPr sz="1200" b="1">
-                <a:solidFill>
-                  <a:srgbClr val="EF4444"/>
-                </a:solidFill>
-                <a:latin typeface="Segoe UI"/>
-              </a:defRPr>
-            </a:pPr>
-            <a:r>
-              <a:t>Zero Route Verifiability &amp; Accountability</a:t>
-            </a:r>
-          </a:p>
-          <a:p>
-            <a:pPr>
-              <a:defRPr sz="1100">
+              <a:defRPr sz="1200">
                 <a:solidFill>
                   <a:srgbClr val="475569"/>
                 </a:solidFill>
@@ -9396,7 +8996,7 @@
               </a:defRPr>
             </a:pPr>
             <a:r>
-              <a:t>Sanitation supervisors have NO digital proof or timestamped logs to verify whether a driver actually emptied a scheduled bin or completely bypassed it during their shift.</a:t>
+              <a:t>Sanitation supervisors have NO digital proof or timestamped logs to verify whether a driver actually emptied a scheduled bin or completely bypassed it.</a:t>
             </a:r>
           </a:p>
         </p:txBody>
@@ -9409,8 +9009,8 @@
         </p:nvSpPr>
         <p:spPr>
           <a:xfrm>
-            <a:off x="731520" y="3886200"/>
-            <a:ext cx="5257800" cy="2148840"/>
+            <a:off x="731520" y="3867911"/>
+            <a:ext cx="5257800" cy="2176272"/>
           </a:xfrm>
           <a:prstGeom prst="roundRect">
             <a:avLst/>
@@ -9444,22 +9044,25 @@
           <a:p>
             <a:pPr algn="ctr">
               <a:spcAft>
+                <a:spcPts val="600"/>
+              </a:spcAft>
+              <a:defRPr sz="1300" b="1">
+                <a:solidFill>
+                  <a:srgbClr val="EF4444"/>
+                </a:solidFill>
+                <a:latin typeface="Segoe UI"/>
+              </a:defRPr>
+            </a:pPr>
+            <a:r>
+              <a:t>Substantial Fuel &amp; Fleet Wastage</a:t>
+            </a:r>
+          </a:p>
+          <a:p>
+            <a:pPr>
+              <a:spcAft>
                 <a:spcPts val="400"/>
               </a:spcAft>
-              <a:defRPr sz="1200" b="1">
-                <a:solidFill>
-                  <a:srgbClr val="EF4444"/>
-                </a:solidFill>
-                <a:latin typeface="Segoe UI"/>
-              </a:defRPr>
-            </a:pPr>
-            <a:r>
-              <a:t>Substantial Fuel &amp; Fleet Wastage</a:t>
-            </a:r>
-          </a:p>
-          <a:p>
-            <a:pPr>
-              <a:defRPr sz="1100">
+              <a:defRPr sz="1200">
                 <a:solidFill>
                   <a:srgbClr val="475569"/>
                 </a:solidFill>
@@ -9467,7 +9070,7 @@
               </a:defRPr>
             </a:pPr>
             <a:r>
-              <a:t>Compactor trucks burn diesel visiting low-waste or already-empty bins, while heavily overflowing market checkpoints remain untouched, causing unbalanced fleet utilization.</a:t>
+              <a:t>Compactor trucks burn expensive diesel visiting empty bins, while heavily overflowing market checkpoints remain untouched, causing major resource waste.</a:t>
             </a:r>
           </a:p>
         </p:txBody>
@@ -9480,8 +9083,8 @@
         </p:nvSpPr>
         <p:spPr>
           <a:xfrm>
-            <a:off x="6172200" y="3886200"/>
-            <a:ext cx="5257800" cy="2148840"/>
+            <a:off x="6172200" y="3867911"/>
+            <a:ext cx="5257800" cy="2176272"/>
           </a:xfrm>
           <a:prstGeom prst="roundRect">
             <a:avLst/>
@@ -9515,22 +9118,25 @@
           <a:p>
             <a:pPr algn="ctr">
               <a:spcAft>
+                <a:spcPts val="600"/>
+              </a:spcAft>
+              <a:defRPr sz="1300" b="1">
+                <a:solidFill>
+                  <a:srgbClr val="F59E0B"/>
+                </a:solidFill>
+                <a:latin typeface="Segoe UI"/>
+              </a:defRPr>
+            </a:pPr>
+            <a:r>
+              <a:t>Reactive &amp; Informal Grievance Loop</a:t>
+            </a:r>
+          </a:p>
+          <a:p>
+            <a:pPr>
+              <a:spcAft>
                 <a:spcPts val="400"/>
               </a:spcAft>
-              <a:defRPr sz="1200" b="1">
-                <a:solidFill>
-                  <a:srgbClr val="F59E0B"/>
-                </a:solidFill>
-                <a:latin typeface="Segoe UI"/>
-              </a:defRPr>
-            </a:pPr>
-            <a:r>
-              <a:t>Reactive &amp; Informal Grievance Loop</a:t>
-            </a:r>
-          </a:p>
-          <a:p>
-            <a:pPr>
-              <a:defRPr sz="1100">
+              <a:defRPr sz="1200">
                 <a:solidFill>
                   <a:srgbClr val="475569"/>
                 </a:solidFill>
@@ -9538,7 +9144,7 @@
               </a:defRPr>
             </a:pPr>
             <a:r>
-              <a:t>Residents discover missed pickups only after days of overflow. Complaints are handled via informal phone calls that lack ticket numbers, escalation, or resolution verification.</a:t>
+              <a:t>Citizens discover missed pickups only after days of overflow. Complaints are handled via informal phone calls that lack ticket numbers or resolution proof.</a:t>
             </a:r>
           </a:p>
         </p:txBody>
@@ -9612,8 +9218,8 @@
         </p:nvSpPr>
         <p:spPr>
           <a:xfrm>
-            <a:off x="731520" y="365760"/>
-            <a:ext cx="4114800" cy="292608"/>
+            <a:off x="731520" y="347472"/>
+            <a:ext cx="4389120" cy="310896"/>
           </a:xfrm>
           <a:prstGeom prst="roundRect">
             <a:avLst/>
@@ -9646,7 +9252,7 @@
           <a:lstStyle/>
           <a:p>
             <a:pPr algn="ctr">
-              <a:defRPr sz="850" b="1">
+              <a:defRPr sz="950" b="1">
                 <a:solidFill>
                   <a:srgbClr val="2563EB"/>
                 </a:solidFill>
@@ -9668,7 +9274,7 @@
         <p:spPr>
           <a:xfrm>
             <a:off x="731520" y="658368"/>
-            <a:ext cx="10698480" cy="594360"/>
+            <a:ext cx="10698480" cy="621792"/>
           </a:xfrm>
           <a:prstGeom prst="rect">
             <a:avLst/>
@@ -9682,7 +9288,7 @@
           <a:lstStyle/>
           <a:p>
             <a:pPr>
-              <a:defRPr sz="2100" b="1">
+              <a:defRPr sz="2200" b="1">
                 <a:solidFill>
                   <a:srgbClr val="0F172A"/>
                 </a:solidFill>
@@ -9703,7 +9309,7 @@
         </p:nvSpPr>
         <p:spPr>
           <a:xfrm>
-            <a:off x="731520" y="1298448"/>
+            <a:off x="731520" y="1316736"/>
             <a:ext cx="10728655" cy="18288"/>
           </a:xfrm>
           <a:prstGeom prst="rect">
@@ -9761,7 +9367,7 @@
           <a:lstStyle/>
           <a:p>
             <a:pPr>
-              <a:defRPr sz="800">
+              <a:defRPr sz="900">
                 <a:solidFill>
                   <a:srgbClr val="64748B"/>
                 </a:solidFill>
@@ -9782,8 +9388,8 @@
         </p:nvSpPr>
         <p:spPr>
           <a:xfrm>
-            <a:off x="731520" y="1554480"/>
-            <a:ext cx="5257800" cy="4480560"/>
+            <a:off x="731520" y="1536192"/>
+            <a:ext cx="5257800" cy="4572000"/>
           </a:xfrm>
           <a:prstGeom prst="roundRect">
             <a:avLst/>
@@ -9817,9 +9423,9 @@
           <a:p>
             <a:pPr algn="ctr">
               <a:spcAft>
-                <a:spcPts val="400"/>
-              </a:spcAft>
-              <a:defRPr sz="1200" b="1">
+                <a:spcPts val="600"/>
+              </a:spcAft>
+              <a:defRPr sz="1300" b="1">
                 <a:solidFill>
                   <a:srgbClr val="EF4444"/>
                 </a:solidFill>
@@ -9833,9 +9439,9 @@
           <a:p>
             <a:pPr>
               <a:spcAft>
-                <a:spcPts val="600"/>
-              </a:spcAft>
-              <a:defRPr sz="1050">
+                <a:spcPts val="800"/>
+              </a:spcAft>
+              <a:defRPr sz="1200">
                 <a:solidFill>
                   <a:srgbClr val="475569"/>
                 </a:solidFill>
@@ -9843,15 +9449,15 @@
               </a:defRPr>
             </a:pPr>
             <a:r>
-              <a:t>• Prohibitive Capital Cost: Procuring thousands of ultrasonic level sensors and LoRaWAN gateways requires massive municipal capital outlay.</a:t>
-            </a:r>
-          </a:p>
-          <a:p>
-            <a:pPr>
-              <a:spcAft>
-                <a:spcPts val="600"/>
-              </a:spcAft>
-              <a:defRPr sz="1050">
+              <a:t>â¢ Prohibitive Capital Cost: Fitting thousands of physical sensors across roadside bins costs millions in municipal funds.</a:t>
+            </a:r>
+          </a:p>
+          <a:p>
+            <a:pPr>
+              <a:spcAft>
+                <a:spcPts val="800"/>
+              </a:spcAft>
+              <a:defRPr sz="1200">
                 <a:solidFill>
                   <a:srgbClr val="475569"/>
                 </a:solidFill>
@@ -9859,15 +9465,15 @@
               </a:defRPr>
             </a:pPr>
             <a:r>
-              <a:t>• Rampant Public Vandalism: Sensors mounted in outdoor bins are stolen, damaged by scavengers, or smashed by hydraulic compactor arms.</a:t>
-            </a:r>
-          </a:p>
-          <a:p>
-            <a:pPr>
-              <a:spcAft>
-                <a:spcPts val="600"/>
-              </a:spcAft>
-              <a:defRPr sz="1050">
+              <a:t>â¢ Rampant Public Vandalism: Outdoor sensors are stolen, damaged by scavengers, or smashed by hydraulic truck compactor arms.</a:t>
+            </a:r>
+          </a:p>
+          <a:p>
+            <a:pPr>
+              <a:spcAft>
+                <a:spcPts val="800"/>
+              </a:spcAft>
+              <a:defRPr sz="1200">
                 <a:solidFill>
                   <a:srgbClr val="475569"/>
                 </a:solidFill>
@@ -9875,15 +9481,15 @@
               </a:defRPr>
             </a:pPr>
             <a:r>
-              <a:t>• Extreme Environmental Wear: Corrosive waste leachate, monsoon rain, and toxic gases rapidly degrade electronic circuitry.</a:t>
-            </a:r>
-          </a:p>
-          <a:p>
-            <a:pPr>
-              <a:spcAft>
-                <a:spcPts val="600"/>
-              </a:spcAft>
-              <a:defRPr sz="1050">
+              <a:t>â¢ Harsh Environmental Damage: Acidic garbage leachate, heavy monsoon rain, and toxic gases rapidly destroy electronic circuitry.</a:t>
+            </a:r>
+          </a:p>
+          <a:p>
+            <a:pPr>
+              <a:spcAft>
+                <a:spcPts val="800"/>
+              </a:spcAft>
+              <a:defRPr sz="1200">
                 <a:solidFill>
                   <a:srgbClr val="475569"/>
                 </a:solidFill>
@@ -9891,7 +9497,7 @@
               </a:defRPr>
             </a:pPr>
             <a:r>
-              <a:t>• Battery Maintenance Overhead: Replacing batteries across thousands of distributed city bins creates an unsustainable maintenance burden.</a:t>
+              <a:t>â¢ Battery Replacement Burden: Swapping batteries across thousands of scattered city bins creates an unmanageable maintenance load.</a:t>
             </a:r>
           </a:p>
         </p:txBody>
@@ -9904,8 +9510,8 @@
         </p:nvSpPr>
         <p:spPr>
           <a:xfrm>
-            <a:off x="6217920" y="1554480"/>
-            <a:ext cx="5257800" cy="4480560"/>
+            <a:off x="6217920" y="1536192"/>
+            <a:ext cx="5257800" cy="4572000"/>
           </a:xfrm>
           <a:prstGeom prst="roundRect">
             <a:avLst/>
@@ -9939,9 +9545,9 @@
           <a:p>
             <a:pPr algn="ctr">
               <a:spcAft>
-                <a:spcPts val="400"/>
-              </a:spcAft>
-              <a:defRPr sz="1200" b="1">
+                <a:spcPts val="600"/>
+              </a:spcAft>
+              <a:defRPr sz="1300" b="1">
                 <a:solidFill>
                   <a:srgbClr val="1E3A8A"/>
                 </a:solidFill>
@@ -9957,7 +9563,7 @@
               <a:spcAft>
                 <a:spcPts val="1000"/>
               </a:spcAft>
-              <a:defRPr sz="1200" b="1">
+              <a:defRPr sz="1250" b="1">
                 <a:solidFill>
                   <a:srgbClr val="1E3A8A"/>
                 </a:solidFill>
@@ -9965,15 +9571,15 @@
               </a:defRPr>
             </a:pPr>
             <a:r>
-              <a:t>Municipal solid waste collection fails NOT because public bins lack electronic chips, but because there is NO real-time digital feedback loop connecting trucks, drivers, supervisors, and residents.</a:t>
-            </a:r>
-          </a:p>
-          <a:p>
-            <a:pPr>
-              <a:spcAft>
-                <a:spcPts val="600"/>
-              </a:spcAft>
-              <a:defRPr sz="1050">
+              <a:t>Municipal solid waste management fails NOT because roadside bins lack chips, but because there is NO real-time digital feedback loop connecting trucks, drivers, supervisors, and citizens.</a:t>
+            </a:r>
+          </a:p>
+          <a:p>
+            <a:pPr>
+              <a:spcAft>
+                <a:spcPts val="800"/>
+              </a:spcAft>
+              <a:defRPr sz="1200">
                 <a:solidFill>
                   <a:srgbClr val="475569"/>
                 </a:solidFill>
@@ -9981,15 +9587,15 @@
               </a:defRPr>
             </a:pPr>
             <a:r>
-              <a:t>• Missing Proof of Service: Paper log sheets permit post-shift falsification of completed pickups.</a:t>
-            </a:r>
-          </a:p>
-          <a:p>
-            <a:pPr>
-              <a:spcAft>
-                <a:spcPts val="600"/>
-              </a:spcAft>
-              <a:defRPr sz="1050">
+              <a:t>â¢ Missing Proof of Service: Paper log sheets allow post-shift falsification with zero physical verifiability.</a:t>
+            </a:r>
+          </a:p>
+          <a:p>
+            <a:pPr>
+              <a:spcAft>
+                <a:spcPts val="800"/>
+              </a:spcAft>
+              <a:defRPr sz="1200">
                 <a:solidFill>
                   <a:srgbClr val="475569"/>
                 </a:solidFill>
@@ -9997,15 +9603,15 @@
               </a:defRPr>
             </a:pPr>
             <a:r>
-              <a:t>• No Obstruction Recording: When roads are blocked by construction, drivers bypass bins with no record.</a:t>
-            </a:r>
-          </a:p>
-          <a:p>
-            <a:pPr>
-              <a:spcAft>
-                <a:spcPts val="600"/>
-              </a:spcAft>
-              <a:defRPr sz="1050">
+              <a:t>â¢ No Obstruction Logging: When roads are blocked by construction, drivers bypass bins with no recorded reason.</a:t>
+            </a:r>
+          </a:p>
+          <a:p>
+            <a:pPr>
+              <a:spcAft>
+                <a:spcPts val="800"/>
+              </a:spcAft>
+              <a:defRPr sz="1200">
                 <a:solidFill>
                   <a:srgbClr val="475569"/>
                 </a:solidFill>
@@ -10013,23 +9619,7 @@
               </a:defRPr>
             </a:pPr>
             <a:r>
-              <a:t>• Zero Stakeholder Synergy: Supervisors cannot see trucks; drivers cannot see complaints; citizens cannot see schedules.</a:t>
-            </a:r>
-          </a:p>
-          <a:p>
-            <a:pPr>
-              <a:spcAft>
-                <a:spcPts val="600"/>
-              </a:spcAft>
-              <a:defRPr sz="1050">
-                <a:solidFill>
-                  <a:srgbClr val="475569"/>
-                </a:solidFill>
-                <a:latin typeface="Segoe UI"/>
-              </a:defRPr>
-            </a:pPr>
-            <a:r>
-              <a:t>• The Strategic Takeaway: A pure software-only system can solve 100% of these challenges without spending a single rupee on in-bin hardware!</a:t>
+              <a:t>â¢ The Strategic Takeaway: A pure software-only system delivers 100% verifiability and tracking without spending a single rupee on in-bin hardware!</a:t>
             </a:r>
           </a:p>
         </p:txBody>
@@ -10103,8 +9693,8 @@
         </p:nvSpPr>
         <p:spPr>
           <a:xfrm>
-            <a:off x="731520" y="365760"/>
-            <a:ext cx="4114800" cy="292608"/>
+            <a:off x="731520" y="347472"/>
+            <a:ext cx="4389120" cy="310896"/>
           </a:xfrm>
           <a:prstGeom prst="roundRect">
             <a:avLst/>
@@ -10137,7 +9727,7 @@
           <a:lstStyle/>
           <a:p>
             <a:pPr algn="ctr">
-              <a:defRPr sz="850" b="1">
+              <a:defRPr sz="950" b="1">
                 <a:solidFill>
                   <a:srgbClr val="2563EB"/>
                 </a:solidFill>
@@ -10159,7 +9749,7 @@
         <p:spPr>
           <a:xfrm>
             <a:off x="731520" y="658368"/>
-            <a:ext cx="10698480" cy="594360"/>
+            <a:ext cx="10698480" cy="621792"/>
           </a:xfrm>
           <a:prstGeom prst="rect">
             <a:avLst/>
@@ -10173,7 +9763,7 @@
           <a:lstStyle/>
           <a:p>
             <a:pPr>
-              <a:defRPr sz="2100" b="1">
+              <a:defRPr sz="2200" b="1">
                 <a:solidFill>
                   <a:srgbClr val="0F172A"/>
                 </a:solidFill>
@@ -10181,7 +9771,7 @@
               </a:defRPr>
             </a:pPr>
             <a:r>
-              <a:t>Proposed Solution: Zero-Hardware Smart Waste Architecture</a:t>
+              <a:t>Proposed Solution: Zero-Hardware Smart Waste Logistics</a:t>
             </a:r>
           </a:p>
         </p:txBody>
@@ -10194,7 +9784,7 @@
         </p:nvSpPr>
         <p:spPr>
           <a:xfrm>
-            <a:off x="731520" y="1298448"/>
+            <a:off x="731520" y="1316736"/>
             <a:ext cx="10728655" cy="18288"/>
           </a:xfrm>
           <a:prstGeom prst="rect">
@@ -10252,7 +9842,7 @@
           <a:lstStyle/>
           <a:p>
             <a:pPr>
-              <a:defRPr sz="800">
+              <a:defRPr sz="900">
                 <a:solidFill>
                   <a:srgbClr val="64748B"/>
                 </a:solidFill>
@@ -10307,7 +9897,7 @@
           <a:lstStyle/>
           <a:p>
             <a:pPr algn="ctr">
-              <a:defRPr sz="1100" b="1">
+              <a:defRPr sz="1150" b="1">
                 <a:solidFill>
                   <a:srgbClr val="1E3A8A"/>
                 </a:solidFill>
@@ -10363,25 +9953,25 @@
           <a:p>
             <a:pPr algn="ctr">
               <a:spcAft>
+                <a:spcPts val="600"/>
+              </a:spcAft>
+              <a:defRPr sz="1300" b="1">
+                <a:solidFill>
+                  <a:srgbClr val="2563EB"/>
+                </a:solidFill>
+                <a:latin typeface="Segoe UI"/>
+              </a:defRPr>
+            </a:pPr>
+            <a:r>
+              <a:t>1. Smartphone Telemetry</a:t>
+            </a:r>
+          </a:p>
+          <a:p>
+            <a:pPr>
+              <a:spcAft>
                 <a:spcPts val="400"/>
               </a:spcAft>
-              <a:defRPr sz="1200" b="1">
-                <a:solidFill>
-                  <a:srgbClr val="2563EB"/>
-                </a:solidFill>
-                <a:latin typeface="Segoe UI"/>
-              </a:defRPr>
-            </a:pPr>
-            <a:r>
-              <a:t>1. Commodity Smartphone Telemetry</a:t>
-            </a:r>
-          </a:p>
-          <a:p>
-            <a:pPr>
-              <a:spcAft>
-                <a:spcPts val="300"/>
-              </a:spcAft>
-              <a:defRPr sz="950">
+              <a:defRPr sz="1150">
                 <a:solidFill>
                   <a:srgbClr val="475569"/>
                 </a:solidFill>
@@ -10389,15 +9979,15 @@
               </a:defRPr>
             </a:pPr>
             <a:r>
-              <a:t>• Field drivers use their existing Android/iOS phones mounted in the truck cab.</a:t>
-            </a:r>
-          </a:p>
-          <a:p>
-            <a:pPr>
-              <a:spcAft>
-                <a:spcPts val="300"/>
-              </a:spcAft>
-              <a:defRPr sz="950">
+              <a:t>â¢ Drivers use existing Android/iOS phones mounted inside the truck cab.</a:t>
+            </a:r>
+          </a:p>
+          <a:p>
+            <a:pPr>
+              <a:spcAft>
+                <a:spcPts val="400"/>
+              </a:spcAft>
+              <a:defRPr sz="1150">
                 <a:solidFill>
                   <a:srgbClr val="475569"/>
                 </a:solidFill>
@@ -10405,15 +9995,15 @@
               </a:defRPr>
             </a:pPr>
             <a:r>
-              <a:t>• Built-in GPS chip continuously streams real-time coordinates, speed, and heading.</a:t>
-            </a:r>
-          </a:p>
-          <a:p>
-            <a:pPr>
-              <a:spcAft>
-                <a:spcPts val="300"/>
-              </a:spcAft>
-              <a:defRPr sz="950">
+              <a:t>â¢ Continuous GPS streaming of real-time coordinates, speed, and heading.</a:t>
+            </a:r>
+          </a:p>
+          <a:p>
+            <a:pPr>
+              <a:spcAft>
+                <a:spcPts val="400"/>
+              </a:spcAft>
+              <a:defRPr sz="1150">
                 <a:solidFill>
                   <a:srgbClr val="475569"/>
                 </a:solidFill>
@@ -10421,7 +10011,7 @@
               </a:defRPr>
             </a:pPr>
             <a:r>
-              <a:t>• Zero vehicle retrofitting or dedicated OBD tracker hardware required.</a:t>
+              <a:t>â¢ Zero vehicle retrofitting or dedicated OBD hardware required.</a:t>
             </a:r>
           </a:p>
         </p:txBody>
@@ -10469,25 +10059,25 @@
           <a:p>
             <a:pPr algn="ctr">
               <a:spcAft>
+                <a:spcPts val="600"/>
+              </a:spcAft>
+              <a:defRPr sz="1300" b="1">
+                <a:solidFill>
+                  <a:srgbClr val="10B981"/>
+                </a:solidFill>
+                <a:latin typeface="Segoe UI"/>
+              </a:defRPr>
+            </a:pPr>
+            <a:r>
+              <a:t>2. Geofenced Verification</a:t>
+            </a:r>
+          </a:p>
+          <a:p>
+            <a:pPr>
+              <a:spcAft>
                 <a:spcPts val="400"/>
               </a:spcAft>
-              <a:defRPr sz="1200" b="1">
-                <a:solidFill>
-                  <a:srgbClr val="10B981"/>
-                </a:solidFill>
-                <a:latin typeface="Segoe UI"/>
-              </a:defRPr>
-            </a:pPr>
-            <a:r>
-              <a:t>2. Geofence-Enforced Proof-of-Service</a:t>
-            </a:r>
-          </a:p>
-          <a:p>
-            <a:pPr>
-              <a:spcAft>
-                <a:spcPts val="300"/>
-              </a:spcAft>
-              <a:defRPr sz="950">
+              <a:defRPr sz="1150">
                 <a:solidFill>
                   <a:srgbClr val="475569"/>
                 </a:solidFill>
@@ -10495,15 +10085,15 @@
               </a:defRPr>
             </a:pPr>
             <a:r>
-              <a:t>• Spherical Haversine calculation verifies truck proximity to target bin coordinates.</a:t>
-            </a:r>
-          </a:p>
-          <a:p>
-            <a:pPr>
-              <a:spcAft>
-                <a:spcPts val="300"/>
-              </a:spcAft>
-              <a:defRPr sz="950">
+              <a:t>â¢ Haversine proximity checks vehicle distance to target bin coordinates.</a:t>
+            </a:r>
+          </a:p>
+          <a:p>
+            <a:pPr>
+              <a:spcAft>
+                <a:spcPts val="400"/>
+              </a:spcAft>
+              <a:defRPr sz="1150">
                 <a:solidFill>
                   <a:srgbClr val="475569"/>
                 </a:solidFill>
@@ -10511,15 +10101,15 @@
               </a:defRPr>
             </a:pPr>
             <a:r>
-              <a:t>• Camera photo capture is unlocked ONLY when within 15 meters of the bin.</a:t>
-            </a:r>
-          </a:p>
-          <a:p>
-            <a:pPr>
-              <a:spcAft>
-                <a:spcPts val="300"/>
-              </a:spcAft>
-              <a:defRPr sz="950">
+              <a:t>â¢ Camera photo capture unlocks ONLY when within 15 meters of the bin.</a:t>
+            </a:r>
+          </a:p>
+          <a:p>
+            <a:pPr>
+              <a:spcAft>
+                <a:spcPts val="400"/>
+              </a:spcAft>
+              <a:defRPr sz="1150">
                 <a:solidFill>
                   <a:srgbClr val="475569"/>
                 </a:solidFill>
@@ -10527,7 +10117,7 @@
               </a:defRPr>
             </a:pPr>
             <a:r>
-              <a:t>• Creates immutable, tamper-resistant proof timestamps and coordinate hashes.</a:t>
+              <a:t>â¢ Creates immutable, tamper-resistant proof timestamps automatically.</a:t>
             </a:r>
           </a:p>
         </p:txBody>
@@ -10575,25 +10165,25 @@
           <a:p>
             <a:pPr algn="ctr">
               <a:spcAft>
+                <a:spcPts val="600"/>
+              </a:spcAft>
+              <a:defRPr sz="1300" b="1">
+                <a:solidFill>
+                  <a:srgbClr val="8B5CF6"/>
+                </a:solidFill>
+                <a:latin typeface="Segoe UI"/>
+              </a:defRPr>
+            </a:pPr>
+            <a:r>
+              <a:t>3. Citizen Crowdsourcing</a:t>
+            </a:r>
+          </a:p>
+          <a:p>
+            <a:pPr>
+              <a:spcAft>
                 <a:spcPts val="400"/>
               </a:spcAft>
-              <a:defRPr sz="1200" b="1">
-                <a:solidFill>
-                  <a:srgbClr val="8B5CF6"/>
-                </a:solidFill>
-                <a:latin typeface="Segoe UI"/>
-              </a:defRPr>
-            </a:pPr>
-            <a:r>
-              <a:t>3. Crowdsourced Citizen Reporting</a:t>
-            </a:r>
-          </a:p>
-          <a:p>
-            <a:pPr>
-              <a:spcAft>
-                <a:spcPts val="300"/>
-              </a:spcAft>
-              <a:defRPr sz="950">
+              <a:defRPr sz="1150">
                 <a:solidFill>
                   <a:srgbClr val="475569"/>
                 </a:solidFill>
@@ -10601,15 +10191,15 @@
               </a:defRPr>
             </a:pPr>
             <a:r>
-              <a:t>• Residents act as intelligent distributed sensors for citywide bin fill monitoring.</a:t>
-            </a:r>
-          </a:p>
-          <a:p>
-            <a:pPr>
-              <a:spcAft>
-                <a:spcPts val="300"/>
-              </a:spcAft>
-              <a:defRPr sz="950">
+              <a:t>â¢ Residents act as distributed sensors for citywide bin fill monitoring.</a:t>
+            </a:r>
+          </a:p>
+          <a:p>
+            <a:pPr>
+              <a:spcAft>
+                <a:spcPts val="400"/>
+              </a:spcAft>
+              <a:defRPr sz="1150">
                 <a:solidFill>
                   <a:srgbClr val="475569"/>
                 </a:solidFill>
@@ -10617,15 +10207,15 @@
               </a:defRPr>
             </a:pPr>
             <a:r>
-              <a:t>• Upload geotagged photos of overflowing bins with one-click GPS pin-drops.</a:t>
-            </a:r>
-          </a:p>
-          <a:p>
-            <a:pPr>
-              <a:spcAft>
-                <a:spcPts val="300"/>
-              </a:spcAft>
-              <a:defRPr sz="950">
+              <a:t>â¢ Geotagged photo reports with one-click GPS pin placement on phone.</a:t>
+            </a:r>
+          </a:p>
+          <a:p>
+            <a:pPr>
+              <a:spcAft>
+                <a:spcPts val="400"/>
+              </a:spcAft>
+              <a:defRPr sz="1150">
                 <a:solidFill>
                   <a:srgbClr val="475569"/>
                 </a:solidFill>
@@ -10633,7 +10223,7 @@
               </a:defRPr>
             </a:pPr>
             <a:r>
-              <a:t>• Eliminates the need for thousands of expensive ultrasonic level sensors.</a:t>
+              <a:t>â¢ Completely replaces costly physical ultrasonic level sensors.</a:t>
             </a:r>
           </a:p>
         </p:txBody>
@@ -10681,25 +10271,25 @@
           <a:p>
             <a:pPr algn="ctr">
               <a:spcAft>
+                <a:spcPts val="600"/>
+              </a:spcAft>
+              <a:defRPr sz="1300" b="1">
+                <a:solidFill>
+                  <a:srgbClr val="F59E0B"/>
+                </a:solidFill>
+                <a:latin typeface="Segoe UI"/>
+              </a:defRPr>
+            </a:pPr>
+            <a:r>
+              <a:t>4. Transparent Exceptions</a:t>
+            </a:r>
+          </a:p>
+          <a:p>
+            <a:pPr>
+              <a:spcAft>
                 <a:spcPts val="400"/>
               </a:spcAft>
-              <a:defRPr sz="1200" b="1">
-                <a:solidFill>
-                  <a:srgbClr val="F59E0B"/>
-                </a:solidFill>
-                <a:latin typeface="Segoe UI"/>
-              </a:defRPr>
-            </a:pPr>
-            <a:r>
-              <a:t>4. Transparent Exception Logging</a:t>
-            </a:r>
-          </a:p>
-          <a:p>
-            <a:pPr>
-              <a:spcAft>
-                <a:spcPts val="300"/>
-              </a:spcAft>
-              <a:defRPr sz="950">
+              <a:defRPr sz="1150">
                 <a:solidFill>
                   <a:srgbClr val="475569"/>
                 </a:solidFill>
@@ -10707,15 +10297,15 @@
               </a:defRPr>
             </a:pPr>
             <a:r>
-              <a:t>• When drivers encounter road excavations or blockages, they log structured skip reasons.</a:t>
-            </a:r>
-          </a:p>
-          <a:p>
-            <a:pPr>
-              <a:spcAft>
-                <a:spcPts val="300"/>
-              </a:spcAft>
-              <a:defRPr sz="950">
+              <a:t>â¢ Drivers log structured skip reasons when facing road excavation or blocks.</a:t>
+            </a:r>
+          </a:p>
+          <a:p>
+            <a:pPr>
+              <a:spcAft>
+                <a:spcPts val="400"/>
+              </a:spcAft>
+              <a:defRPr sz="1150">
                 <a:solidFill>
                   <a:srgbClr val="475569"/>
                 </a:solidFill>
@@ -10723,15 +10313,15 @@
               </a:defRPr>
             </a:pPr>
             <a:r>
-              <a:t>• Instantly alerts supervisors and flags the checkpoint in red on the live map.</a:t>
-            </a:r>
-          </a:p>
-          <a:p>
-            <a:pPr>
-              <a:spcAft>
-                <a:spcPts val="300"/>
-              </a:spcAft>
-              <a:defRPr sz="950">
+              <a:t>â¢ Instantly flags checkpoints on supervisor GIS map for audit review.</a:t>
+            </a:r>
+          </a:p>
+          <a:p>
+            <a:pPr>
+              <a:spcAft>
+                <a:spcPts val="400"/>
+              </a:spcAft>
+              <a:defRPr sz="1150">
                 <a:solidFill>
                   <a:srgbClr val="475569"/>
                 </a:solidFill>
@@ -10739,7 +10329,7 @@
               </a:defRPr>
             </a:pPr>
             <a:r>
-              <a:t>• Distinguishes between legitimate operational impediments and driver negligence.</a:t>
+              <a:t>â¢ Distinguishes between legitimate impediments and driver negligence.</a:t>
             </a:r>
           </a:p>
         </p:txBody>
@@ -10813,8 +10403,8 @@
         </p:nvSpPr>
         <p:spPr>
           <a:xfrm>
-            <a:off x="731520" y="365760"/>
-            <a:ext cx="4114800" cy="292608"/>
+            <a:off x="731520" y="347472"/>
+            <a:ext cx="4389120" cy="310896"/>
           </a:xfrm>
           <a:prstGeom prst="roundRect">
             <a:avLst/>
@@ -10847,7 +10437,7 @@
           <a:lstStyle/>
           <a:p>
             <a:pPr algn="ctr">
-              <a:defRPr sz="850" b="1">
+              <a:defRPr sz="950" b="1">
                 <a:solidFill>
                   <a:srgbClr val="2563EB"/>
                 </a:solidFill>
@@ -10869,7 +10459,7 @@
         <p:spPr>
           <a:xfrm>
             <a:off x="731520" y="658368"/>
-            <a:ext cx="10698480" cy="594360"/>
+            <a:ext cx="10698480" cy="621792"/>
           </a:xfrm>
           <a:prstGeom prst="rect">
             <a:avLst/>
@@ -10883,7 +10473,7 @@
           <a:lstStyle/>
           <a:p>
             <a:pPr>
-              <a:defRPr sz="2100" b="1">
+              <a:defRPr sz="2200" b="1">
                 <a:solidFill>
                   <a:srgbClr val="0F172A"/>
                 </a:solidFill>
@@ -10891,7 +10481,7 @@
               </a:defRPr>
             </a:pPr>
             <a:r>
-              <a:t>System Architecture: 3-Tier Enterprise Web Model</a:t>
+              <a:t>System Architecture: End-to-End Enterprise Web Platform</a:t>
             </a:r>
           </a:p>
         </p:txBody>
@@ -10904,7 +10494,7 @@
         </p:nvSpPr>
         <p:spPr>
           <a:xfrm>
-            <a:off x="731520" y="1298448"/>
+            <a:off x="731520" y="1316736"/>
             <a:ext cx="10728655" cy="18288"/>
           </a:xfrm>
           <a:prstGeom prst="rect">
@@ -10962,7 +10552,7 @@
           <a:lstStyle/>
           <a:p>
             <a:pPr>
-              <a:defRPr sz="800">
+              <a:defRPr sz="900">
                 <a:solidFill>
                   <a:srgbClr val="64748B"/>
                 </a:solidFill>
@@ -11042,9 +10632,9 @@
           <a:p>
             <a:pPr algn="ctr">
               <a:spcAft>
-                <a:spcPts val="400"/>
-              </a:spcAft>
-              <a:defRPr sz="1200" b="1">
+                <a:spcPts val="600"/>
+              </a:spcAft>
+              <a:defRPr sz="1300" b="1">
                 <a:solidFill>
                   <a:srgbClr val="2563EB"/>
                 </a:solidFill>
@@ -11052,7 +10642,7 @@
               </a:defRPr>
             </a:pPr>
             <a:r>
-              <a:t>Tier 1: Presentation Layer (Client Interfaces)</a:t>
+              <a:t>Tier 1: Presentation Layer (Client Portals)</a:t>
             </a:r>
           </a:p>
           <a:p>
@@ -11060,7 +10650,7 @@
               <a:spcAft>
                 <a:spcPts val="200"/>
               </a:spcAft>
-              <a:defRPr sz="900">
+              <a:defRPr sz="1100">
                 <a:solidFill>
                   <a:srgbClr val="475569"/>
                 </a:solidFill>
@@ -11068,7 +10658,7 @@
               </a:defRPr>
             </a:pPr>
             <a:r>
-              <a:t>• Supervisor Command Hub: Responsive Desktop browser (Leaflet.js GIS, Telemetry).</a:t>
+              <a:t>â¢ Supervisor Command Hub: Desktop GIS dashboard with Leaflet map &amp; telemetry.</a:t>
             </a:r>
           </a:p>
           <a:p>
@@ -11076,7 +10666,7 @@
               <a:spcAft>
                 <a:spcPts val="200"/>
               </a:spcAft>
-              <a:defRPr sz="900">
+              <a:defRPr sz="1100">
                 <a:solidFill>
                   <a:srgbClr val="475569"/>
                 </a:solidFill>
@@ -11084,7 +10674,7 @@
               </a:defRPr>
             </a:pPr>
             <a:r>
-              <a:t>• Driver Field Portal: Touch-optimized mobile PWA for one-hand in-cab operation.</a:t>
+              <a:t>â¢ Driver Mobile Manifest: Touch-friendly PWA for single-hand cab operation.</a:t>
             </a:r>
           </a:p>
           <a:p>
@@ -11092,7 +10682,7 @@
               <a:spcAft>
                 <a:spcPts val="200"/>
               </a:spcAft>
-              <a:defRPr sz="900">
+              <a:defRPr sz="1100">
                 <a:solidFill>
                   <a:srgbClr val="475569"/>
                 </a:solidFill>
@@ -11100,7 +10690,7 @@
               </a:defRPr>
             </a:pPr>
             <a:r>
-              <a:t>• Citizen Portal: Public responsive web interface for geotagged grievance reporting.</a:t>
+              <a:t>â¢ Public Citizen Portal: Responsive portal for reporting overflowing garbage.</a:t>
             </a:r>
           </a:p>
         </p:txBody>
@@ -11148,9 +10738,9 @@
           <a:p>
             <a:pPr algn="ctr">
               <a:spcAft>
-                <a:spcPts val="400"/>
-              </a:spcAft>
-              <a:defRPr sz="1200" b="1">
+                <a:spcPts val="600"/>
+              </a:spcAft>
+              <a:defRPr sz="1300" b="1">
                 <a:solidFill>
                   <a:srgbClr val="10B981"/>
                 </a:solidFill>
@@ -11158,7 +10748,7 @@
               </a:defRPr>
             </a:pPr>
             <a:r>
-              <a:t>Tier 2: Application / Logic Layer (Node.js &amp; Express)</a:t>
+              <a:t>Tier 2: Application Layer (Node.js &amp; Express)</a:t>
             </a:r>
           </a:p>
           <a:p>
@@ -11166,7 +10756,7 @@
               <a:spcAft>
                 <a:spcPts val="200"/>
               </a:spcAft>
-              <a:defRPr sz="900">
+              <a:defRPr sz="1100">
                 <a:solidFill>
                   <a:srgbClr val="475569"/>
                 </a:solidFill>
@@ -11174,7 +10764,7 @@
               </a:defRPr>
             </a:pPr>
             <a:r>
-              <a:t>• REST API Gateway: Handles stateless JSON endpoints (/api/vehicles, /api/stops).</a:t>
+              <a:t>â¢ REST API Gateway: High-performance endpoints for vehicle and stop data.</a:t>
             </a:r>
           </a:p>
           <a:p>
@@ -11182,7 +10772,7 @@
               <a:spcAft>
                 <a:spcPts val="200"/>
               </a:spcAft>
-              <a:defRPr sz="900">
+              <a:defRPr sz="1100">
                 <a:solidFill>
                   <a:srgbClr val="475569"/>
                 </a:solidFill>
@@ -11190,7 +10780,7 @@
               </a:defRPr>
             </a:pPr>
             <a:r>
-              <a:t>• Geofencing Engine: Haversine distance calculations and coordinate validation.</a:t>
+              <a:t>â¢ Geofencing Engine: Mathematical 15m radius proximity validation.</a:t>
             </a:r>
           </a:p>
           <a:p>
@@ -11198,7 +10788,7 @@
               <a:spcAft>
                 <a:spcPts val="200"/>
               </a:spcAft>
-              <a:defRPr sz="900">
+              <a:defRPr sz="1100">
                 <a:solidFill>
                   <a:srgbClr val="475569"/>
                 </a:solidFill>
@@ -11206,23 +10796,7 @@
               </a:defRPr>
             </a:pPr>
             <a:r>
-              <a:t>• Telemetry &amp; Simulation Router: Real-time coordinate interpolation and streaming.</a:t>
-            </a:r>
-          </a:p>
-          <a:p>
-            <a:pPr>
-              <a:spcAft>
-                <a:spcPts val="200"/>
-              </a:spcAft>
-              <a:defRPr sz="900">
-                <a:solidFill>
-                  <a:srgbClr val="475569"/>
-                </a:solidFill>
-                <a:latin typeface="Segoe UI"/>
-              </a:defRPr>
-            </a:pPr>
-            <a:r>
-              <a:t>• Grievance Engine: Auto-dispatching tickets and managing resolution workflows.</a:t>
+              <a:t>â¢ Grievance Engine: Auto-assigns complaint tickets and tracks clearance.</a:t>
             </a:r>
           </a:p>
         </p:txBody>
@@ -11270,9 +10844,9 @@
           <a:p>
             <a:pPr algn="ctr">
               <a:spcAft>
-                <a:spcPts val="400"/>
-              </a:spcAft>
-              <a:defRPr sz="1200" b="1">
+                <a:spcPts val="600"/>
+              </a:spcAft>
+              <a:defRPr sz="1300" b="1">
                 <a:solidFill>
                   <a:srgbClr val="F59E0B"/>
                 </a:solidFill>
@@ -11280,7 +10854,7 @@
               </a:defRPr>
             </a:pPr>
             <a:r>
-              <a:t>Tier 3: Data Persistence Layer (Storage)</a:t>
+              <a:t>Tier 3: Persistence Layer (Data &amp; Audit)</a:t>
             </a:r>
           </a:p>
           <a:p>
@@ -11288,7 +10862,7 @@
               <a:spcAft>
                 <a:spcPts val="200"/>
               </a:spcAft>
-              <a:defRPr sz="900">
+              <a:defRPr sz="1100">
                 <a:solidFill>
                   <a:srgbClr val="475569"/>
                 </a:solidFill>
@@ -11296,7 +10870,7 @@
               </a:defRPr>
             </a:pPr>
             <a:r>
-              <a:t>• In-Memory Cache: Sub-millisecond read/write access for live vehicle tracking.</a:t>
+              <a:t>â¢ Fleet State Store: Real-time coordinate cache for sub-second map updates.</a:t>
             </a:r>
           </a:p>
           <a:p>
@@ -11304,7 +10878,7 @@
               <a:spcAft>
                 <a:spcPts val="200"/>
               </a:spcAft>
-              <a:defRPr sz="900">
+              <a:defRPr sz="1100">
                 <a:solidFill>
                   <a:srgbClr val="475569"/>
                 </a:solidFill>
@@ -11312,7 +10886,7 @@
               </a:defRPr>
             </a:pPr>
             <a:r>
-              <a:t>• Route &amp; Geometry Store: Pre-registered ward stop coordinates and street waypoints.</a:t>
+              <a:t>â¢ Ward Route Store: Pre-mapped checkpoint waypoints and collection quotas.</a:t>
             </a:r>
           </a:p>
           <a:p>
@@ -11320,7 +10894,7 @@
               <a:spcAft>
                 <a:spcPts val="200"/>
               </a:spcAft>
-              <a:defRPr sz="900">
+              <a:defRPr sz="1100">
                 <a:solidFill>
                   <a:srgbClr val="475569"/>
                 </a:solidFill>
@@ -11328,7 +10902,7 @@
               </a:defRPr>
             </a:pPr>
             <a:r>
-              <a:t>• Tamper-Resistant Audit Log: Immutable history of all verified pickups and skips.</a:t>
+              <a:t>â¢ Audit Trail: Immutable historical log of all verified collections and skips.</a:t>
             </a:r>
           </a:p>
         </p:txBody>
@@ -11402,8 +10976,8 @@
         </p:nvSpPr>
         <p:spPr>
           <a:xfrm>
-            <a:off x="731520" y="365760"/>
-            <a:ext cx="4114800" cy="292608"/>
+            <a:off x="731520" y="347472"/>
+            <a:ext cx="4389120" cy="310896"/>
           </a:xfrm>
           <a:prstGeom prst="roundRect">
             <a:avLst/>
@@ -11436,7 +11010,7 @@
           <a:lstStyle/>
           <a:p>
             <a:pPr algn="ctr">
-              <a:defRPr sz="850" b="1">
+              <a:defRPr sz="950" b="1">
                 <a:solidFill>
                   <a:srgbClr val="2563EB"/>
                 </a:solidFill>
@@ -11444,7 +11018,7 @@
               </a:defRPr>
             </a:pPr>
             <a:r>
-              <a:t>06 | DATA FLOW DESIGN</a:t>
+              <a:t>06 | DATA PIPELINE</a:t>
             </a:r>
           </a:p>
         </p:txBody>
@@ -11458,7 +11032,7 @@
         <p:spPr>
           <a:xfrm>
             <a:off x="731520" y="658368"/>
-            <a:ext cx="10698480" cy="594360"/>
+            <a:ext cx="10698480" cy="621792"/>
           </a:xfrm>
           <a:prstGeom prst="rect">
             <a:avLst/>
@@ -11472,7 +11046,7 @@
           <a:lstStyle/>
           <a:p>
             <a:pPr>
-              <a:defRPr sz="2100" b="1">
+              <a:defRPr sz="2200" b="1">
                 <a:solidFill>
                   <a:srgbClr val="0F172A"/>
                 </a:solidFill>
@@ -11480,7 +11054,7 @@
               </a:defRPr>
             </a:pPr>
             <a:r>
-              <a:t>Data Flow Architecture: Process Decomposition &amp; Data Stores</a:t>
+              <a:t>Operational Workflow &amp; Telemetry Data Pipeline</a:t>
             </a:r>
           </a:p>
         </p:txBody>
@@ -11493,7 +11067,7 @@
         </p:nvSpPr>
         <p:spPr>
           <a:xfrm>
-            <a:off x="731520" y="1298448"/>
+            <a:off x="731520" y="1316736"/>
             <a:ext cx="10728655" cy="18288"/>
           </a:xfrm>
           <a:prstGeom prst="rect">
@@ -11551,7 +11125,7 @@
           <a:lstStyle/>
           <a:p>
             <a:pPr>
-              <a:defRPr sz="800">
+              <a:defRPr sz="900">
                 <a:solidFill>
                   <a:srgbClr val="64748B"/>
                 </a:solidFill>
@@ -11597,7 +11171,7 @@
         <p:spPr>
           <a:xfrm>
             <a:off x="6583680" y="1508760"/>
-            <a:ext cx="4876495" cy="4526280"/>
+            <a:ext cx="4876495" cy="4572000"/>
           </a:xfrm>
           <a:prstGeom prst="roundRect">
             <a:avLst/>
@@ -11631,9 +11205,9 @@
           <a:p>
             <a:pPr algn="ctr">
               <a:spcAft>
-                <a:spcPts val="400"/>
-              </a:spcAft>
-              <a:defRPr sz="1200" b="1">
+                <a:spcPts val="600"/>
+              </a:spcAft>
+              <a:defRPr sz="1300" b="1">
                 <a:solidFill>
                   <a:srgbClr val="1E3A8A"/>
                 </a:solidFill>
@@ -11641,15 +11215,15 @@
               </a:defRPr>
             </a:pPr>
             <a:r>
-              <a:t>Process Routing &amp; Data Stores Analysis</a:t>
-            </a:r>
-          </a:p>
-          <a:p>
-            <a:pPr>
-              <a:spcAft>
-                <a:spcPts val="400"/>
-              </a:spcAft>
-              <a:defRPr sz="950">
+              <a:t>End-to-End Information Pipeline</a:t>
+            </a:r>
+          </a:p>
+          <a:p>
+            <a:pPr>
+              <a:spcAft>
+                <a:spcPts val="600"/>
+              </a:spcAft>
+              <a:defRPr sz="1200">
                 <a:solidFill>
                   <a:srgbClr val="475569"/>
                 </a:solidFill>
@@ -11657,15 +11231,15 @@
               </a:defRPr>
             </a:pPr>
             <a:r>
-              <a:t>• External Entities: Driver (Field Worker), Sanitation Supervisor (Admin), and Citizen (Resident).</a:t>
-            </a:r>
-          </a:p>
-          <a:p>
-            <a:pPr>
-              <a:spcAft>
-                <a:spcPts val="400"/>
-              </a:spcAft>
-              <a:defRPr sz="950">
+              <a:t>â¢ Telemetry Streaming: Driver smartphone GPS broadcasts current coordinates and speed to the Node.js server every 5 seconds.</a:t>
+            </a:r>
+          </a:p>
+          <a:p>
+            <a:pPr>
+              <a:spcAft>
+                <a:spcPts val="600"/>
+              </a:spcAft>
+              <a:defRPr sz="1200">
                 <a:solidFill>
                   <a:srgbClr val="475569"/>
                 </a:solidFill>
@@ -11673,15 +11247,15 @@
               </a:defRPr>
             </a:pPr>
             <a:r>
-              <a:t>• Process 1.0 (Fleet Telemetry Engine): Ingests periodic smartphone GPS latitude/longitude feeds and updates active vehicle coordinates in Data Store D1.</a:t>
-            </a:r>
-          </a:p>
-          <a:p>
-            <a:pPr>
-              <a:spcAft>
-                <a:spcPts val="400"/>
-              </a:spcAft>
-              <a:defRPr sz="950">
+              <a:t>â¢ Spatial Geofence Matching: Backend continuously checks truck coordinates against scheduled ward stops using the Haversine equation.</a:t>
+            </a:r>
+          </a:p>
+          <a:p>
+            <a:pPr>
+              <a:spcAft>
+                <a:spcPts val="600"/>
+              </a:spcAft>
+              <a:defRPr sz="1200">
                 <a:solidFill>
                   <a:srgbClr val="475569"/>
                 </a:solidFill>
@@ -11689,15 +11263,15 @@
               </a:defRPr>
             </a:pPr>
             <a:r>
-              <a:t>• Process 2.0 (Checkpoint Geofencing): Matches real-time vehicle positions against target checkpoints in Master Route Store D2.</a:t>
-            </a:r>
-          </a:p>
-          <a:p>
-            <a:pPr>
-              <a:spcAft>
-                <a:spcPts val="400"/>
-              </a:spcAft>
-              <a:defRPr sz="950">
+              <a:t>â¢ Proof-of-Service Verification: When truck is within 15 meters, the driver captures photo proof. The system cryptographically stamps time and coordinates.</a:t>
+            </a:r>
+          </a:p>
+          <a:p>
+            <a:pPr>
+              <a:spcAft>
+                <a:spcPts val="600"/>
+              </a:spcAft>
+              <a:defRPr sz="1200">
                 <a:solidFill>
                   <a:srgbClr val="475569"/>
                 </a:solidFill>
@@ -11705,15 +11279,15 @@
               </a:defRPr>
             </a:pPr>
             <a:r>
-              <a:t>• Process 3.0 (Proof-of-Service Verification): Validates 15m proximity, inspects camera photos, checks timestamp integrity, and commits records to Proof DB D3.</a:t>
-            </a:r>
-          </a:p>
-          <a:p>
-            <a:pPr>
-              <a:spcAft>
-                <a:spcPts val="400"/>
-              </a:spcAft>
-              <a:defRPr sz="950">
+              <a:t>â¢ Citizen Redressal Synchronization: Residents log bin overflow tickets with GPS coordinates; resolved tickets update automatically upon vehicle clearance.</a:t>
+            </a:r>
+          </a:p>
+          <a:p>
+            <a:pPr>
+              <a:spcAft>
+                <a:spcPts val="600"/>
+              </a:spcAft>
+              <a:defRPr sz="1200">
                 <a:solidFill>
                   <a:srgbClr val="475569"/>
                 </a:solidFill>
@@ -11721,23 +11295,7 @@
               </a:defRPr>
             </a:pPr>
             <a:r>
-              <a:t>• Process 4.0 (Citizen Grievance Redressal): Receives citizen complaints with photo evidence, generates ticket IDs, and stores records in Grievance DB D4.</a:t>
-            </a:r>
-          </a:p>
-          <a:p>
-            <a:pPr>
-              <a:spcAft>
-                <a:spcPts val="400"/>
-              </a:spcAft>
-              <a:defRPr sz="950">
-                <a:solidFill>
-                  <a:srgbClr val="475569"/>
-                </a:solidFill>
-                <a:latin typeface="Segoe UI"/>
-              </a:defRPr>
-            </a:pPr>
-            <a:r>
-              <a:t>• Process 5.0 (Audit &amp; Performance Reporting): Aggregates ward-wise waste weights, route completion rates, and fuel conservation KPIs.</a:t>
+              <a:t>â¢ Supervisor Audit &amp; KPI Aggregation: Computes real-time route completion percentages, missed pickups, and total daily waste tonnage collected.</a:t>
             </a:r>
           </a:p>
         </p:txBody>
@@ -11811,8 +11369,8 @@
         </p:nvSpPr>
         <p:spPr>
           <a:xfrm>
-            <a:off x="731520" y="365760"/>
-            <a:ext cx="4114800" cy="292608"/>
+            <a:off x="731520" y="347472"/>
+            <a:ext cx="4389120" cy="310896"/>
           </a:xfrm>
           <a:prstGeom prst="roundRect">
             <a:avLst/>
@@ -11845,7 +11403,7 @@
           <a:lstStyle/>
           <a:p>
             <a:pPr algn="ctr">
-              <a:defRPr sz="850" b="1">
+              <a:defRPr sz="950" b="1">
                 <a:solidFill>
                   <a:srgbClr val="2563EB"/>
                 </a:solidFill>
@@ -11867,7 +11425,7 @@
         <p:spPr>
           <a:xfrm>
             <a:off x="731520" y="658368"/>
-            <a:ext cx="10698480" cy="594360"/>
+            <a:ext cx="10698480" cy="621792"/>
           </a:xfrm>
           <a:prstGeom prst="rect">
             <a:avLst/>
@@ -11881,7 +11439,7 @@
           <a:lstStyle/>
           <a:p>
             <a:pPr>
-              <a:defRPr sz="2100" b="1">
+              <a:defRPr sz="2200" b="1">
                 <a:solidFill>
                   <a:srgbClr val="0F172A"/>
                 </a:solidFill>
@@ -11889,7 +11447,7 @@
               </a:defRPr>
             </a:pPr>
             <a:r>
-              <a:t>Module 1: Supervisor Real-Time GIS Fleet Command Hub</a:t>
+              <a:t>Module 1: Supervisor Real-Time GIS Fleet Command Center</a:t>
             </a:r>
           </a:p>
         </p:txBody>
@@ -11902,7 +11460,7 @@
         </p:nvSpPr>
         <p:spPr>
           <a:xfrm>
-            <a:off x="731520" y="1298448"/>
+            <a:off x="731520" y="1316736"/>
             <a:ext cx="10728655" cy="18288"/>
           </a:xfrm>
           <a:prstGeom prst="rect">
@@ -11960,7 +11518,7 @@
           <a:lstStyle/>
           <a:p>
             <a:pPr>
-              <a:defRPr sz="800">
+              <a:defRPr sz="900">
                 <a:solidFill>
                   <a:srgbClr val="64748B"/>
                 </a:solidFill>
@@ -12006,7 +11564,7 @@
         <p:spPr>
           <a:xfrm>
             <a:off x="6766560" y="1508760"/>
-            <a:ext cx="4693615" cy="4526280"/>
+            <a:ext cx="4693615" cy="4572000"/>
           </a:xfrm>
           <a:prstGeom prst="roundRect">
             <a:avLst/>
@@ -12040,9 +11598,9 @@
           <a:p>
             <a:pPr algn="ctr">
               <a:spcAft>
-                <a:spcPts val="400"/>
-              </a:spcAft>
-              <a:defRPr sz="1200" b="1">
+                <a:spcPts val="600"/>
+              </a:spcAft>
+              <a:defRPr sz="1300" b="1">
                 <a:solidFill>
                   <a:srgbClr val="1E3A8A"/>
                 </a:solidFill>
@@ -12050,15 +11608,15 @@
               </a:defRPr>
             </a:pPr>
             <a:r>
-              <a:t>Supervisor Operational Capabilities</a:t>
-            </a:r>
-          </a:p>
-          <a:p>
-            <a:pPr>
-              <a:spcAft>
-                <a:spcPts val="400"/>
-              </a:spcAft>
-              <a:defRPr sz="950">
+              <a:t>Centralized Municipal Fleet Control</a:t>
+            </a:r>
+          </a:p>
+          <a:p>
+            <a:pPr>
+              <a:spcAft>
+                <a:spcPts val="800"/>
+              </a:spcAft>
+              <a:defRPr sz="1200">
                 <a:solidFill>
                   <a:srgbClr val="475569"/>
                 </a:solidFill>
@@ -12066,15 +11624,15 @@
               </a:defRPr>
             </a:pPr>
             <a:r>
-              <a:t>• Interactive GIS Canvas (Leaflet &amp; OSM): Renders Visakhapatnam / Bheemili sector with route polylines, vehicle positions, and checkpoint status markers.</a:t>
-            </a:r>
-          </a:p>
-          <a:p>
-            <a:pPr>
-              <a:spcAft>
-                <a:spcPts val="400"/>
-              </a:spcAft>
-              <a:defRPr sz="950">
+              <a:t>â¢ Live Interactive GIS Map: Renders OpenStreetMap canvas with color-coded stop checkpoints (Green: Collected, Amber: Next, Gray: Pending, Red: Skipped).</a:t>
+            </a:r>
+          </a:p>
+          <a:p>
+            <a:pPr>
+              <a:spcAft>
+                <a:spcPts val="800"/>
+              </a:spcAft>
+              <a:defRPr sz="1200">
                 <a:solidFill>
                   <a:srgbClr val="475569"/>
                 </a:solidFill>
@@ -12082,15 +11640,15 @@
               </a:defRPr>
             </a:pPr>
             <a:r>
-              <a:t>• Color-Coded Status Markers: Green for Verified Collected, Amber for Pending, Red for Skipped / Obstruction, Blue for Active Truck, Purple for Citizen Hotspots.</a:t>
-            </a:r>
-          </a:p>
-          <a:p>
-            <a:pPr>
-              <a:spcAft>
-                <a:spcPts val="400"/>
-              </a:spcAft>
-              <a:defRPr sz="950">
+              <a:t>â¢ Active Vehicle Telemetry: Displays truck speed (e.g. 24 km/h), vehicle heading, driver identity, and GPS satellite lock status in real time.</a:t>
+            </a:r>
+          </a:p>
+          <a:p>
+            <a:pPr>
+              <a:spcAft>
+                <a:spcPts val="800"/>
+              </a:spcAft>
+              <a:defRPr sz="1200">
                 <a:solidFill>
                   <a:srgbClr val="475569"/>
                 </a:solidFill>
@@ -12098,15 +11656,15 @@
               </a:defRPr>
             </a:pPr>
             <a:r>
-              <a:t>• Real-Time Vehicle Telemetry: Monitors truck AP39-TM-1001 live speed (24 km/h), fuel level (78%), battery health, and GPS accuracy (•4m).</a:t>
-            </a:r>
-          </a:p>
-          <a:p>
-            <a:pPr>
-              <a:spcAft>
-                <a:spcPts val="400"/>
-              </a:spcAft>
-              <a:defRPr sz="950">
+              <a:t>â¢ Ward Route Progress Gauge: Computes route completion dynamically (e.g. 4/6 Stops Collected - 67%) with live cumulative waste payload tally.</a:t>
+            </a:r>
+          </a:p>
+          <a:p>
+            <a:pPr>
+              <a:spcAft>
+                <a:spcPts val="800"/>
+              </a:spcAft>
+              <a:defRPr sz="1200">
                 <a:solidFill>
                   <a:srgbClr val="475569"/>
                 </a:solidFill>
@@ -12114,23 +11672,7 @@
               </a:defRPr>
             </a:pPr>
             <a:r>
-              <a:t>• Vehicle Simulation Controller: Includes Play, Pause, and Step Next controls allowing supervisors to simulate coordinate movements during driver training.</a:t>
-            </a:r>
-          </a:p>
-          <a:p>
-            <a:pPr>
-              <a:spcAft>
-                <a:spcPts val="400"/>
-              </a:spcAft>
-              <a:defRPr sz="950">
-                <a:solidFill>
-                  <a:srgbClr val="475569"/>
-                </a:solidFill>
-                <a:latin typeface="Segoe UI"/>
-              </a:defRPr>
-            </a:pPr>
-            <a:r>
-              <a:t>• Live Proof-of-Service Stream: Displays live thumbnails of driver-uploaded collection photos alongside timestamp and geofence tolerance accuracy.</a:t>
+              <a:t>â¢ Immediate Anomaly Alerts: Instantly flags delays, unauthorized route deviations, or bypassed stops for supervisor intervention.</a:t>
             </a:r>
           </a:p>
         </p:txBody>
@@ -12204,8 +11746,8 @@
         </p:nvSpPr>
         <p:spPr>
           <a:xfrm>
-            <a:off x="731520" y="365760"/>
-            <a:ext cx="4114800" cy="292608"/>
+            <a:off x="731520" y="347472"/>
+            <a:ext cx="4389120" cy="310896"/>
           </a:xfrm>
           <a:prstGeom prst="roundRect">
             <a:avLst/>
@@ -12238,7 +11780,7 @@
           <a:lstStyle/>
           <a:p>
             <a:pPr algn="ctr">
-              <a:defRPr sz="850" b="1">
+              <a:defRPr sz="950" b="1">
                 <a:solidFill>
                   <a:srgbClr val="2563EB"/>
                 </a:solidFill>
@@ -12260,7 +11802,7 @@
         <p:spPr>
           <a:xfrm>
             <a:off x="731520" y="658368"/>
-            <a:ext cx="10698480" cy="594360"/>
+            <a:ext cx="10698480" cy="621792"/>
           </a:xfrm>
           <a:prstGeom prst="rect">
             <a:avLst/>
@@ -12274,7 +11816,7 @@
           <a:lstStyle/>
           <a:p>
             <a:pPr>
-              <a:defRPr sz="2100" b="1">
+              <a:defRPr sz="2200" b="1">
                 <a:solidFill>
                   <a:srgbClr val="0F172A"/>
                 </a:solidFill>
@@ -12282,7 +11824,7 @@
               </a:defRPr>
             </a:pPr>
             <a:r>
-              <a:t>Module 2: Driver Touch-Optimized Mobile Field Manifest</a:t>
+              <a:t>Module 2: Driver Touch-Optimized Mobile Manifest</a:t>
             </a:r>
           </a:p>
         </p:txBody>
@@ -12295,7 +11837,7 @@
         </p:nvSpPr>
         <p:spPr>
           <a:xfrm>
-            <a:off x="731520" y="1298448"/>
+            <a:off x="731520" y="1316736"/>
             <a:ext cx="10728655" cy="18288"/>
           </a:xfrm>
           <a:prstGeom prst="rect">
@@ -12353,7 +11895,7 @@
           <a:lstStyle/>
           <a:p>
             <a:pPr>
-              <a:defRPr sz="800">
+              <a:defRPr sz="900">
                 <a:solidFill>
                   <a:srgbClr val="64748B"/>
                 </a:solidFill>
@@ -12399,7 +11941,7 @@
         <p:spPr>
           <a:xfrm>
             <a:off x="6766560" y="1508760"/>
-            <a:ext cx="4693615" cy="4526280"/>
+            <a:ext cx="4693615" cy="4572000"/>
           </a:xfrm>
           <a:prstGeom prst="roundRect">
             <a:avLst/>
@@ -12433,9 +11975,9 @@
           <a:p>
             <a:pPr algn="ctr">
               <a:spcAft>
-                <a:spcPts val="400"/>
-              </a:spcAft>
-              <a:defRPr sz="1200" b="1">
+                <a:spcPts val="600"/>
+              </a:spcAft>
+              <a:defRPr sz="1300" b="1">
                 <a:solidFill>
                   <a:srgbClr val="1E3A8A"/>
                 </a:solidFill>
@@ -12449,9 +11991,9 @@
           <a:p>
             <a:pPr>
               <a:spcAft>
-                <a:spcPts val="400"/>
-              </a:spcAft>
-              <a:defRPr sz="950">
+                <a:spcPts val="600"/>
+              </a:spcAft>
+              <a:defRPr sz="1200">
                 <a:solidFill>
                   <a:srgbClr val="475569"/>
                 </a:solidFill>
@@ -12459,15 +12001,15 @@
               </a:defRPr>
             </a:pPr>
             <a:r>
-              <a:t>• Mobile Frame Optimization: Specifically tailored for drivers operating compactor trucks with one-hand touch navigation on commodity Android phones.</a:t>
-            </a:r>
-          </a:p>
-          <a:p>
-            <a:pPr>
-              <a:spcAft>
-                <a:spcPts val="400"/>
-              </a:spcAft>
-              <a:defRPr sz="950">
+              <a:t>â¢ Cab-Friendly Touch UI: Designed with large tap targets for effortless one-hand operation on drivers' commodity smartphones.</a:t>
+            </a:r>
+          </a:p>
+          <a:p>
+            <a:pPr>
+              <a:spcAft>
+                <a:spcPts val="600"/>
+              </a:spcAft>
+              <a:defRPr sz="1200">
                 <a:solidFill>
                   <a:srgbClr val="475569"/>
                 </a:solidFill>
@@ -12475,15 +12017,15 @@
               </a:defRPr>
             </a:pPr>
             <a:r>
-              <a:t>• GPS Geofencing Status Banner: Monitors active GNSS satellite connection, providing high-precision location lock (•4m accuracy).</a:t>
-            </a:r>
-          </a:p>
-          <a:p>
-            <a:pPr>
-              <a:spcAft>
-                <a:spcPts val="400"/>
-              </a:spcAft>
-              <a:defRPr sz="950">
+              <a:t>â¢ GPS Satellite Status Banner: Continuously monitors active GNSS satellite connection and displays location precision (e.g. Â±4m accuracy).</a:t>
+            </a:r>
+          </a:p>
+          <a:p>
+            <a:pPr>
+              <a:spcAft>
+                <a:spcPts val="600"/>
+              </a:spcAft>
+              <a:defRPr sz="1200">
                 <a:solidFill>
                   <a:srgbClr val="475569"/>
                 </a:solidFill>
@@ -12491,15 +12033,15 @@
               </a:defRPr>
             </a:pPr>
             <a:r>
-              <a:t>• Dynamic Route Progress Tracking: Visual completion progress bar (e.g. 2 of 6 Stops Completed - 33%) updating instantly upon pickup verification.</a:t>
-            </a:r>
-          </a:p>
-          <a:p>
-            <a:pPr>
-              <a:spcAft>
-                <a:spcPts val="400"/>
-              </a:spcAft>
-              <a:defRPr sz="950">
+              <a:t>â¢ Dynamic Route Progress: Live completion progress bar updates instantly upon every verified pickup (e.g., 2 of 6 Stops Completed - 33%).</a:t>
+            </a:r>
+          </a:p>
+          <a:p>
+            <a:pPr>
+              <a:spcAft>
+                <a:spcPts val="600"/>
+              </a:spcAft>
+              <a:defRPr sz="1200">
                 <a:solidFill>
                   <a:srgbClr val="475569"/>
                 </a:solidFill>
@@ -12507,15 +12049,15 @@
               </a:defRPr>
             </a:pPr>
             <a:r>
-              <a:t>• One-Tap 'Mark Collected' Action: Unlocked only when vehicle is within 15 meters of bin. Prompts camera snapshot, captures coordinates, and records waste weight.</a:t>
-            </a:r>
-          </a:p>
-          <a:p>
-            <a:pPr>
-              <a:spcAft>
-                <a:spcPts val="400"/>
-              </a:spcAft>
-              <a:defRPr sz="950">
+              <a:t>â¢ 15m Geofenced Proof Capture: The 'Mark Collected' button unlocks ONLY when the vehicle is physically within 15 meters of the scheduled bin.</a:t>
+            </a:r>
+          </a:p>
+          <a:p>
+            <a:pPr>
+              <a:spcAft>
+                <a:spcPts val="600"/>
+              </a:spcAft>
+              <a:defRPr sz="1200">
                 <a:solidFill>
                   <a:srgbClr val="475569"/>
                 </a:solidFill>
@@ -12523,7 +12065,7 @@
               </a:defRPr>
             </a:pPr>
             <a:r>
-              <a:t>• Structured 'Skip Stop' Exception Workflow: When access roads are blocked, the driver selects from standardized reasons (excavation, narrow lane, hazardous waste) with custom remarks.</a:t>
+              <a:t>â¢ Structured Exception Logging: When encountering road blockages or construction, drivers log verified skip reasons (e.g., Narrow Lane, Excavation).</a:t>
             </a:r>
           </a:p>
         </p:txBody>
